--- a/reports/presentation.pptx
+++ b/reports/presentation.pptx
@@ -2374,33 +2374,6 @@
         </p:nvSpPr>
         <p:spPr>
           <a:xfrm>
-            <a:off x="6949440" y="0"/>
-            <a:ext cx="2194560" cy="5143500"/>
-          </a:xfrm>
-          <a:prstGeom prst="rect">
-            <a:avLst/>
-          </a:prstGeom>
-          <a:solidFill>
-            <a:srgbClr val="C0392B">
-              <a:alpha val="18000"/>
-            </a:srgbClr>
-          </a:solidFill>
-          <a:ln w="12700">
-            <a:solidFill>
-              <a:srgbClr val="C0392B"/>
-            </a:solidFill>
-            <a:prstDash val="solid"/>
-          </a:ln>
-        </p:spPr>
-      </p:sp>
-      <p:sp>
-        <p:nvSpPr>
-          <p:cNvPr id="3" name="Shape 1"/>
-          <p:cNvSpPr/>
-          <p:nvPr/>
-        </p:nvSpPr>
-        <p:spPr>
-          <a:xfrm>
             <a:off x="0" y="0"/>
             <a:ext cx="64008" cy="5143500"/>
           </a:xfrm>
@@ -2420,7 +2393,57 @@
       </p:sp>
       <p:sp>
         <p:nvSpPr>
-          <p:cNvPr id="4" name="Text 2"/>
+          <p:cNvPr id="3" name="Shape 1"/>
+          <p:cNvSpPr/>
+          <p:nvPr/>
+        </p:nvSpPr>
+        <p:spPr>
+          <a:xfrm>
+            <a:off x="9079992" y="0"/>
+            <a:ext cx="64008" cy="5143500"/>
+          </a:xfrm>
+          <a:prstGeom prst="rect">
+            <a:avLst/>
+          </a:prstGeom>
+          <a:solidFill>
+            <a:srgbClr val="C0392B"/>
+          </a:solidFill>
+          <a:ln w="12700">
+            <a:solidFill>
+              <a:srgbClr val="C0392B"/>
+            </a:solidFill>
+            <a:prstDash val="solid"/>
+          </a:ln>
+        </p:spPr>
+      </p:sp>
+      <p:sp>
+        <p:nvSpPr>
+          <p:cNvPr id="4" name="Shape 2"/>
+          <p:cNvSpPr/>
+          <p:nvPr/>
+        </p:nvSpPr>
+        <p:spPr>
+          <a:xfrm>
+            <a:off x="0" y="5093208"/>
+            <a:ext cx="9144000" cy="50292"/>
+          </a:xfrm>
+          <a:prstGeom prst="rect">
+            <a:avLst/>
+          </a:prstGeom>
+          <a:solidFill>
+            <a:srgbClr val="C0392B"/>
+          </a:solidFill>
+          <a:ln w="12700">
+            <a:solidFill>
+              <a:srgbClr val="C0392B"/>
+            </a:solidFill>
+            <a:prstDash val="solid"/>
+          </a:ln>
+        </p:spPr>
+      </p:sp>
+      <p:sp>
+        <p:nvSpPr>
+          <p:cNvPr id="5" name="Text 3"/>
           <p:cNvSpPr/>
           <p:nvPr/>
         </p:nvSpPr>
@@ -2459,7 +2482,7 @@
       </p:sp>
       <p:sp>
         <p:nvSpPr>
-          <p:cNvPr id="5" name="Text 3"/>
+          <p:cNvPr id="6" name="Text 4"/>
           <p:cNvSpPr/>
           <p:nvPr/>
         </p:nvSpPr>
@@ -2515,7 +2538,7 @@
       </p:sp>
       <p:sp>
         <p:nvSpPr>
-          <p:cNvPr id="6" name="Text 4"/>
+          <p:cNvPr id="7" name="Text 5"/>
           <p:cNvSpPr/>
           <p:nvPr/>
         </p:nvSpPr>
@@ -2554,7 +2577,7 @@
       </p:sp>
       <p:sp>
         <p:nvSpPr>
-          <p:cNvPr id="7" name="Shape 5"/>
+          <p:cNvPr id="8" name="Shape 6"/>
           <p:cNvSpPr/>
           <p:nvPr/>
         </p:nvSpPr>
@@ -2579,7 +2602,7 @@
       </p:sp>
       <p:sp>
         <p:nvSpPr>
-          <p:cNvPr id="8" name="Text 6"/>
+          <p:cNvPr id="9" name="Text 7"/>
           <p:cNvSpPr/>
           <p:nvPr/>
         </p:nvSpPr>
@@ -2632,7 +2655,7 @@
       </p:sp>
       <p:sp>
         <p:nvSpPr>
-          <p:cNvPr id="9" name="Text 7"/>
+          <p:cNvPr id="10" name="Text 8"/>
           <p:cNvSpPr/>
           <p:nvPr/>
         </p:nvSpPr>
@@ -2685,7 +2708,7 @@
       </p:sp>
       <p:sp>
         <p:nvSpPr>
-          <p:cNvPr id="10" name="Text 8"/>
+          <p:cNvPr id="11" name="Text 9"/>
           <p:cNvSpPr/>
           <p:nvPr/>
         </p:nvSpPr>
@@ -2738,7 +2761,7 @@
       </p:sp>
       <p:sp>
         <p:nvSpPr>
-          <p:cNvPr id="11" name="Text 9"/>
+          <p:cNvPr id="12" name="Text 10"/>
           <p:cNvSpPr/>
           <p:nvPr/>
         </p:nvSpPr>
@@ -2791,7 +2814,7 @@
       </p:sp>
       <p:sp>
         <p:nvSpPr>
-          <p:cNvPr id="12" name="Text 10"/>
+          <p:cNvPr id="13" name="Text 11"/>
           <p:cNvSpPr/>
           <p:nvPr/>
         </p:nvSpPr>
@@ -2844,14 +2867,14 @@
       </p:sp>
       <p:sp>
         <p:nvSpPr>
-          <p:cNvPr id="13" name="Text 11"/>
+          <p:cNvPr id="14" name="Text 12"/>
           <p:cNvSpPr/>
           <p:nvPr/>
         </p:nvSpPr>
         <p:spPr>
           <a:xfrm>
             <a:off x="3611880" y="3611880"/>
-            <a:ext cx="5120640" cy="320040"/>
+            <a:ext cx="5212080" cy="502920"/>
           </a:xfrm>
           <a:prstGeom prst="rect">
             <a:avLst/>
@@ -2860,14 +2883,14 @@
           <a:ln/>
         </p:spPr>
         <p:txBody>
-          <a:bodyPr wrap="square" rtlCol="0" anchor="ctr"/>
+          <a:bodyPr wrap="square" rtlCol="0" anchor="t"/>
           <a:lstStyle/>
           <a:p>
             <a:pPr indent="0" marL="0">
               <a:buNone/>
             </a:pPr>
             <a:r>
-              <a:rPr lang="en-US" sz="950" b="1" dirty="0">
+              <a:rPr lang="en-US" sz="880" b="1" dirty="0">
                 <a:solidFill>
                   <a:srgbClr val="D5D8DC"/>
                 </a:solidFill>
@@ -2881,7 +2904,7 @@
               <a:buNone/>
             </a:pPr>
             <a:r>
-              <a:rPr lang="en-US" sz="950" dirty="0">
+              <a:rPr lang="en-US" sz="880" dirty="0">
                 <a:solidFill>
                   <a:srgbClr val="FFFFFF"/>
                 </a:solidFill>
@@ -2889,22 +2912,39 @@
                 <a:ea typeface="Calibri" pitchFamily="34" charset="-122"/>
                 <a:cs typeface="Calibri" pitchFamily="34" charset="-120"/>
               </a:rPr>
-              <a:t>Bajpai · Bhardwaj · Maurya · Singh · Shah · Jha</a:t>
-            </a:r>
-            <a:endParaRPr lang="en-US" sz="950" dirty="0"/>
-          </a:p>
-        </p:txBody>
-      </p:sp>
-      <p:sp>
-        <p:nvSpPr>
-          <p:cNvPr id="14" name="Text 12"/>
-          <p:cNvSpPr/>
-          <p:nvPr/>
-        </p:nvSpPr>
-        <p:spPr>
-          <a:xfrm>
-            <a:off x="3611880" y="3977640"/>
-            <a:ext cx="5120640" cy="320040"/>
+              <a:t>Abhinav Bajpai · Kushagra Bhardwaj · Rishiwant K. Maurya</a:t>
+            </a:r>
+            <a:endParaRPr lang="en-US" sz="880" dirty="0"/>
+          </a:p>
+          <a:p>
+            <a:pPr indent="0" marL="0">
+              <a:buNone/>
+            </a:pPr>
+            <a:r>
+              <a:rPr lang="en-US" sz="880" dirty="0">
+                <a:solidFill>
+                  <a:srgbClr val="FFFFFF"/>
+                </a:solidFill>
+                <a:latin typeface="Calibri" pitchFamily="34" charset="0"/>
+                <a:ea typeface="Calibri" pitchFamily="34" charset="-122"/>
+                <a:cs typeface="Calibri" pitchFamily="34" charset="-120"/>
+              </a:rPr>
+              <a:t>                    Pranav Singh · Samriddhi Shah · Drishti Jha</a:t>
+            </a:r>
+            <a:endParaRPr lang="en-US" sz="880" dirty="0"/>
+          </a:p>
+        </p:txBody>
+      </p:sp>
+      <p:sp>
+        <p:nvSpPr>
+          <p:cNvPr id="15" name="Text 13"/>
+          <p:cNvSpPr/>
+          <p:nvPr/>
+        </p:nvSpPr>
+        <p:spPr>
+          <a:xfrm>
+            <a:off x="3611880" y="4160520"/>
+            <a:ext cx="5212080" cy="320040"/>
           </a:xfrm>
           <a:prstGeom prst="rect">
             <a:avLst/>
@@ -2957,13 +2997,13 @@
       </p:sp>
       <p:sp>
         <p:nvSpPr>
-          <p:cNvPr id="15" name="Text 13"/>
-          <p:cNvSpPr/>
-          <p:nvPr/>
-        </p:nvSpPr>
-        <p:spPr>
-          <a:xfrm>
-            <a:off x="3611880" y="4343400"/>
+          <p:cNvPr id="16" name="Text 14"/>
+          <p:cNvSpPr/>
+          <p:nvPr/>
+        </p:nvSpPr>
+        <p:spPr>
+          <a:xfrm>
+            <a:off x="3611880" y="4526280"/>
             <a:ext cx="5120640" cy="320040"/>
           </a:xfrm>
           <a:prstGeom prst="rect">
@@ -8439,7 +8479,7 @@
                 <a:ea typeface="Calibri" pitchFamily="34" charset="-122"/>
                 <a:cs typeface="Calibri" pitchFamily="34" charset="-120"/>
               </a:rPr>
-              <a:t>558,675</a:t>
+              <a:t>548,486</a:t>
             </a:r>
             <a:endParaRPr lang="en-US" sz="3600" dirty="0"/>
           </a:p>
@@ -9018,7 +9058,7 @@
                 <a:ea typeface="Calibri" pitchFamily="34" charset="-122"/>
                 <a:cs typeface="Calibri" pitchFamily="34" charset="-120"/>
               </a:rPr>
-              <a:t>558,675 Transactions — Cleaned, Enriched, and Analysis-Ready</a:t>
+              <a:t>548,486 Transactions — Cleaned, Enriched, and Analysis-Ready</a:t>
             </a:r>
             <a:endParaRPr lang="en-US" sz="2300" dirty="0"/>
           </a:p>
@@ -9296,7 +9336,7 @@
                 <a:ea typeface="Calibri" pitchFamily="34" charset="-122"/>
                 <a:cs typeface="Calibri" pitchFamily="34" charset="-120"/>
               </a:rPr>
-              <a:t>162 removed</a:t>
+              <a:t>10,351 removed</a:t>
             </a:r>
             <a:endParaRPr lang="en-US" sz="850" dirty="0"/>
           </a:p>
@@ -10456,7 +10496,7 @@
                 <a:ea typeface="Calibri" pitchFamily="34" charset="-122"/>
                 <a:cs typeface="Calibri" pitchFamily="34" charset="-120"/>
               </a:rPr>
-              <a:t>558,675</a:t>
+              <a:t>548,486</a:t>
             </a:r>
             <a:endParaRPr lang="en-US" sz="2800" dirty="0"/>
           </a:p>
@@ -10566,7 +10606,7 @@
                 <a:ea typeface="Calibri" pitchFamily="34" charset="-122"/>
                 <a:cs typeface="Calibri" pitchFamily="34" charset="-120"/>
               </a:rPr>
-              <a:t>$7.54B</a:t>
+              <a:t>$7.45B</a:t>
             </a:r>
             <a:endParaRPr lang="en-US" sz="2800" dirty="0"/>
           </a:p>
@@ -11569,7 +11609,7 @@
                 <a:ea typeface="Calibri" pitchFamily="34" charset="-122"/>
                 <a:cs typeface="Calibri" pitchFamily="34" charset="-120"/>
               </a:rPr>
-              <a:t>From 558,675 real transactions — here is what the data actually says</a:t>
+              <a:t>From 548,486 real transactions — here is what the data actually says</a:t>
             </a:r>
             <a:endParaRPr lang="en-US" sz="1100" dirty="0"/>
           </a:p>
@@ -12396,7 +12436,7 @@
                 <a:ea typeface="Calibri" pitchFamily="34" charset="-122"/>
                 <a:cs typeface="Calibri" pitchFamily="34" charset="-120"/>
               </a:rPr>
-              <a:t>Buy in August, sell in April — 2–4% seasonal swing</a:t>
+              <a:t>Summer is the peak — source in Q4 and Q1</a:t>
             </a:r>
             <a:endParaRPr lang="en-US" sz="1050" dirty="0"/>
           </a:p>
@@ -12435,7 +12475,7 @@
                 <a:ea typeface="Calibri" pitchFamily="34" charset="-122"/>
                 <a:cs typeface="Calibri" pitchFamily="34" charset="-120"/>
               </a:rPr>
-              <a:t>Prices peak March–April (tax refund season) and soften August–September. Aligning acquisition timing to the trough captures extra margin before Q4 recovery.</a:t>
+              <a:t>Mid-year prices (Jun–Jul avg $16,700+) run significantly above Dec–Apr lows ($10,300–$11,200). Front-load acquisition in Q4/Q1 and retail in summer to capture the seasonal spread.</a:t>
             </a:r>
             <a:endParaRPr lang="en-US" sz="880" dirty="0"/>
           </a:p>
@@ -13585,7 +13625,7 @@
                 <a:ea typeface="Calibri" pitchFamily="34" charset="-122"/>
                 <a:cs typeface="Calibri" pitchFamily="34" charset="-120"/>
               </a:rPr>
-              <a:t>REJECT H0  |  F = 8,420</a:t>
+              <a:t>REJECT H0  |  F = 44,299</a:t>
             </a:r>
             <a:endParaRPr lang="en-US" sz="950" dirty="0"/>
           </a:p>
@@ -16160,7 +16200,7 @@
                 <a:ea typeface="Calibri" pitchFamily="34" charset="-122"/>
                 <a:cs typeface="Calibri" pitchFamily="34" charset="-120"/>
               </a:rPr>
-              <a:t>Insight 5: Aug–Sep prices soften 2–4%  |  Front-load Q3 acquisition, retail in Q1–Q2</a:t>
+              <a:t>Insight 5: Jun–Jul avg $16,700+ vs Dec–Apr avg $10,300–$11,200  |  Source in Q4/Q1, retail in summer</a:t>
             </a:r>
             <a:endParaRPr lang="en-US" sz="850" dirty="0"/>
           </a:p>

--- a/reports/presentation.pptx
+++ b/reports/presentation.pptx
@@ -352,318 +352,6 @@
         <c:majorTickMark val="out"/>
         <c:minorTickMark val="none"/>
         <c:tickLblPos val="nextTo"/>
-        <c:spPr>
-          <a:ln w="12700" cap="flat">
-            <a:solidFill>
-              <a:srgbClr val="888888"/>
-            </a:solidFill>
-            <a:prstDash val="solid"/>
-            <a:round/>
-          </a:ln>
-        </c:spPr>
-        <c:txPr>
-          <a:bodyPr/>
-          <a:lstStyle/>
-          <a:p>
-            <a:pPr>
-              <a:defRPr sz="1200" b="0" i="0" u="none" strike="noStrike">
-                <a:solidFill>
-                  <a:srgbClr val="4A4A4A"/>
-                </a:solidFill>
-                <a:latin typeface="Arial"/>
-              </a:defRPr>
-            </a:pPr>
-            <a:endParaRPr lang="en-US"/>
-          </a:p>
-        </c:txPr>
-        <c:crossAx val="2094734554"/>
-        <c:crosses val="autoZero"/>
-        <c:crossBetween val="between"/>
-      </c:valAx>
-      <c:spPr>
-        <a:noFill/>
-        <a:ln>
-          <a:noFill/>
-        </a:ln>
-        <a:effectLst/>
-      </c:spPr>
-    </c:plotArea>
-    <c:plotVisOnly val="1"/>
-    <c:dispBlanksAs val="span"/>
-  </c:chart>
-  <c:spPr>
-    <a:solidFill>
-      <a:srgbClr val="F4F6F8"/>
-    </a:solidFill>
-    <a:ln>
-      <a:noFill/>
-    </a:ln>
-    <a:effectLst/>
-  </c:spPr>
-  <c:externalData r:id="rId1">
-    <c:autoUpdate val="0"/>
-  </c:externalData>
-</c:chartSpace>
-</file>
-
-<file path=ppt/charts/chart2.xml><?xml version="1.0" encoding="utf-8"?>
-<c:chartSpace xmlns:c="http://schemas.openxmlformats.org/drawingml/2006/chart" xmlns:a="http://schemas.openxmlformats.org/drawingml/2006/main" xmlns:r="http://schemas.openxmlformats.org/officeDocument/2006/relationships">
-  <c:date1904 val="0"/>
-  <c:roundedCorners val="0"/>
-  <c:chart>
-    <c:title>
-      <c:tx>
-        <c:rich>
-          <a:bodyPr/>
-          <a:lstStyle/>
-          <a:p>
-            <a:pPr>
-              <a:defRPr sz="850" b="0" i="0" u="none" strike="noStrike">
-                <a:solidFill>
-                  <a:srgbClr val="1C2951"/>
-                </a:solidFill>
-                <a:latin typeface="Arial"/>
-              </a:defRPr>
-            </a:pPr>
-            <a:r>
-              <a:rPr sz="850" b="0" i="0" u="none" strike="noStrike">
-                <a:solidFill>
-                  <a:srgbClr val="1C2951"/>
-                </a:solidFill>
-                <a:latin typeface="Arial"/>
-              </a:rPr>
-              <a:t>Feature Importance (Pearson r)</a:t>
-            </a:r>
-          </a:p>
-        </c:rich>
-      </c:tx>
-      <c:layout/>
-      <c:overlay val="0"/>
-    </c:title>
-    <c:autoTitleDeleted val="0"/>
-    <c:plotArea>
-      <c:layout/>
-      <c:barChart>
-        <c:barDir val="bar"/>
-        <c:grouping val="clustered"/>
-        <c:varyColors val="0"/>
-        <c:ser>
-          <c:idx val="0"/>
-          <c:order val="0"/>
-          <c:tx>
-            <c:strRef>
-              <c:f>Sheet1!$B$1</c:f>
-              <c:strCache>
-                <c:ptCount val="1"/>
-                <c:pt idx="0">
-                  <c:v>Importance</c:v>
-                </c:pt>
-              </c:strCache>
-            </c:strRef>
-          </c:tx>
-          <c:spPr>
-            <a:solidFill>
-              <a:srgbClr val="4A4A4A"/>
-            </a:solidFill>
-            <a:effectLst/>
-          </c:spPr>
-          <c:invertIfNegative val="0"/>
-          <c:dLbls>
-            <c:numFmt formatCode="#,##0" sourceLinked="0"/>
-            <c:txPr>
-              <a:bodyPr/>
-              <a:lstStyle/>
-              <a:p>
-                <a:pPr>
-                  <a:defRPr b="0" i="0" strike="noStrike" sz="1200" u="none">
-                    <a:solidFill>
-                      <a:srgbClr val="4A4A4A"/>
-                    </a:solidFill>
-                    <a:latin typeface="Arial"/>
-                  </a:defRPr>
-                </a:pPr>
-              </a:p>
-            </c:txPr>
-            <c:showLegendKey val="0"/>
-            <c:showVal val="1"/>
-            <c:showCatName val="0"/>
-            <c:showSerName val="0"/>
-            <c:showPercent val="0"/>
-            <c:showBubbleSize val="0"/>
-            <c:showLeaderLines val="0"/>
-          </c:dLbls>
-          <c:dPt>
-            <c:idx val="0"/>
-            <c:invertIfNegative val="0"/>
-            <c:bubble3D val="0"/>
-            <c:spPr>
-              <a:solidFill>
-                <a:srgbClr val="4A4A4A"/>
-              </a:solidFill>
-              <a:effectLst/>
-            </c:spPr>
-          </c:dPt>
-          <c:dPt>
-            <c:idx val="1"/>
-            <c:invertIfNegative val="0"/>
-            <c:bubble3D val="0"/>
-            <c:spPr>
-              <a:solidFill>
-                <a:srgbClr val="4A4A4A"/>
-              </a:solidFill>
-              <a:effectLst/>
-            </c:spPr>
-          </c:dPt>
-          <c:dPt>
-            <c:idx val="2"/>
-            <c:invertIfNegative val="0"/>
-            <c:bubble3D val="0"/>
-            <c:spPr>
-              <a:solidFill>
-                <a:srgbClr val="4A4A4A"/>
-              </a:solidFill>
-              <a:effectLst/>
-            </c:spPr>
-          </c:dPt>
-          <c:dPt>
-            <c:idx val="3"/>
-            <c:invertIfNegative val="0"/>
-            <c:bubble3D val="0"/>
-            <c:spPr>
-              <a:solidFill>
-                <a:srgbClr val="1C2951"/>
-              </a:solidFill>
-              <a:effectLst/>
-            </c:spPr>
-          </c:dPt>
-          <c:cat>
-            <c:multiLvlStrRef>
-              <c:f>Sheet1!$A$2:$A$5</c:f>
-              <c:multiLvlStrCache>
-                <c:ptCount val="4"/>
-                <c:lvl>
-                  <c:pt idx="0">
-                    <c:v>Vehicle Age</c:v>
-                  </c:pt>
-                  <c:pt idx="1">
-                    <c:v>Condition</c:v>
-                  </c:pt>
-                  <c:pt idx="2">
-                    <c:v>Odometer</c:v>
-                  </c:pt>
-                  <c:pt idx="3">
-                    <c:v>MMR</c:v>
-                  </c:pt>
-                </c:lvl>
-              </c:multiLvlStrCache>
-            </c:multiLvlStrRef>
-          </c:cat>
-          <c:val>
-            <c:numRef>
-              <c:f>Sheet1!$B$2:$B$5</c:f>
-              <c:numCache>
-                <c:formatCode>General</c:formatCode>
-                <c:ptCount val="4"/>
-                <c:pt idx="0">
-                  <c:v>0.21</c:v>
-                </c:pt>
-                <c:pt idx="1">
-                  <c:v>0.36</c:v>
-                </c:pt>
-                <c:pt idx="2">
-                  <c:v>0.52</c:v>
-                </c:pt>
-                <c:pt idx="3">
-                  <c:v>0.97</c:v>
-                </c:pt>
-              </c:numCache>
-            </c:numRef>
-          </c:val>
-        </c:ser>
-        <c:dLbls>
-          <c:numFmt formatCode="#,##0" sourceLinked="0"/>
-          <c:txPr>
-            <a:bodyPr/>
-            <a:lstStyle/>
-            <a:p>
-              <a:pPr>
-                <a:defRPr b="0" i="0" strike="noStrike" sz="1200" u="none">
-                  <a:solidFill>
-                    <a:srgbClr val="4A4A4A"/>
-                  </a:solidFill>
-                  <a:latin typeface="Arial"/>
-                </a:defRPr>
-              </a:pPr>
-            </a:p>
-          </c:txPr>
-          <c:showLegendKey val="0"/>
-          <c:showVal val="1"/>
-          <c:showCatName val="0"/>
-          <c:showSerName val="0"/>
-          <c:showPercent val="0"/>
-          <c:showBubbleSize val="0"/>
-          <c:showLeaderLines val="0"/>
-        </c:dLbls>
-        <c:gapWidth val="150"/>
-        <c:overlap val="0"/>
-        <c:axId val="2094734554"/>
-        <c:axId val="2094734552"/>
-        <c:axId val="2094734556"/>
-      </c:barChart>
-      <c:catAx>
-        <c:axId val="2094734554"/>
-        <c:scaling>
-          <c:orientation val="minMax"/>
-        </c:scaling>
-        <c:delete val="0"/>
-        <c:axPos val="l"/>
-        <c:numFmt formatCode="General" sourceLinked="1"/>
-        <c:majorTickMark val="out"/>
-        <c:minorTickMark val="none"/>
-        <c:tickLblPos val="nextTo"/>
-        <c:spPr>
-          <a:ln w="12700" cap="flat">
-            <a:solidFill>
-              <a:srgbClr val="888888"/>
-            </a:solidFill>
-            <a:prstDash val="solid"/>
-            <a:round/>
-          </a:ln>
-        </c:spPr>
-        <c:txPr>
-          <a:bodyPr/>
-          <a:lstStyle/>
-          <a:p>
-            <a:pPr>
-              <a:defRPr sz="1200" b="0" i="0" u="none" strike="noStrike">
-                <a:solidFill>
-                  <a:srgbClr val="4A4A4A"/>
-                </a:solidFill>
-                <a:latin typeface="Arial"/>
-              </a:defRPr>
-            </a:pPr>
-            <a:endParaRPr lang="en-US"/>
-          </a:p>
-        </c:txPr>
-        <c:crossAx val="2094734552"/>
-        <c:crosses val="autoZero"/>
-        <c:auto val="1"/>
-        <c:lblAlgn val="ctr"/>
-        <c:noMultiLvlLbl val="1"/>
-      </c:catAx>
-      <c:valAx>
-        <c:axId val="2094734552"/>
-        <c:scaling>
-          <c:orientation val="minMax"/>
-          <c:max val="1"/>
-          <c:min val="0"/>
-        </c:scaling>
-        <c:delete val="0"/>
-        <c:axPos val="b"/>
-        <c:numFmt formatCode="General" sourceLinked="0"/>
-        <c:majorTickMark val="out"/>
-        <c:minorTickMark val="none"/>
-        <c:tickLblPos val="low"/>
         <c:spPr>
           <a:ln w="12700" cap="flat">
             <a:solidFill>
@@ -3248,7 +2936,7 @@
                 <a:ea typeface="Calibri" pitchFamily="34" charset="-122"/>
                 <a:cs typeface="Calibri" pitchFamily="34" charset="-120"/>
               </a:rPr>
-              <a:t>Data is 2014–2015 only</a:t>
+              <a:t>Auction sales cover 2014–2015 only</a:t>
             </a:r>
             <a:endParaRPr lang="en-US" sz="1100" dirty="0"/>
           </a:p>
@@ -3287,7 +2975,7 @@
                 <a:ea typeface="Calibri" pitchFamily="34" charset="-122"/>
                 <a:cs typeface="Calibri" pitchFamily="34" charset="-120"/>
               </a:rPr>
-              <a:t>EV adoption, COVID-era shocks, and interest rate cycles are not captured. Findings need re-validation on current data before operational deployment.</a:t>
+              <a:t>Vehicle model years span 1990–2015, but all auction transactions are from 2014–2015. EV adoption, COVID-era shocks, and interest rate cycles are not captured.</a:t>
             </a:r>
             <a:endParaRPr lang="en-US" sz="950" dirty="0"/>
           </a:p>
@@ -3404,7 +3092,7 @@
                 <a:ea typeface="Calibri" pitchFamily="34" charset="-122"/>
                 <a:cs typeface="Calibri" pitchFamily="34" charset="-120"/>
               </a:rPr>
-              <a:t>Linear regression has limits</a:t>
+              <a:t>Geographic sample skew</a:t>
             </a:r>
             <a:endParaRPr lang="en-US" sz="1100" dirty="0"/>
           </a:p>
@@ -3443,7 +3131,7 @@
                 <a:ea typeface="Calibri" pitchFamily="34" charset="-122"/>
                 <a:cs typeface="Calibri" pitchFamily="34" charset="-120"/>
               </a:rPr>
-              <a:t>Depreciation is non-linear (especially years 0–5). A tree-based model (XGBoost, Random Forest) would improve accuracy in edge cases and luxury segments.</a:t>
+              <a:t>CA, FL, TX dominate transaction volume. States with fewer than 1,000 records should be interpreted with caution at state level.</a:t>
             </a:r>
             <a:endParaRPr lang="en-US" sz="950" dirty="0"/>
           </a:p>
@@ -3482,7 +3170,7 @@
                 <a:ea typeface="Calibri" pitchFamily="34" charset="-122"/>
                 <a:cs typeface="Calibri" pitchFamily="34" charset="-120"/>
               </a:rPr>
-              <a:t>Geographic sample skew</a:t>
+              <a:t>MMR is a wholesale benchmark only</a:t>
             </a:r>
             <a:endParaRPr lang="en-US" sz="1100" dirty="0"/>
           </a:p>
@@ -3521,7 +3209,7 @@
                 <a:ea typeface="Calibri" pitchFamily="34" charset="-122"/>
                 <a:cs typeface="Calibri" pitchFamily="34" charset="-120"/>
               </a:rPr>
-              <a:t>CA, FL, TX dominate transaction volume. States with fewer than 1,000 records should be interpreted with caution at state level.</a:t>
+              <a:t>All insights apply to the auction floor. Retail consumer prices carry 10–25% dealer margins — a separate analysis is needed for consumer-facing recommendations.</a:t>
             </a:r>
             <a:endParaRPr lang="en-US" sz="950" dirty="0"/>
           </a:p>
@@ -3656,7 +3344,7 @@
                 <a:ea typeface="Calibri" pitchFamily="34" charset="-122"/>
                 <a:cs typeface="Calibri" pitchFamily="34" charset="-120"/>
               </a:rPr>
-              <a:t>Real-Time Pricing API</a:t>
+              <a:t>Real-Time Auction Dashboard</a:t>
             </a:r>
             <a:endParaRPr lang="en-US" sz="1100" dirty="0"/>
           </a:p>
@@ -3695,7 +3383,7 @@
                 <a:ea typeface="Calibri" pitchFamily="34" charset="-122"/>
                 <a:cs typeface="Calibri" pitchFamily="34" charset="-120"/>
               </a:rPr>
-              <a:t>Input: make, model, year, mileage, condition. Output: predicted price range with confidence interval — on the buyer's mobile at auction.</a:t>
+              <a:t>Connect Tableau to a live data feed — replace the static 2014–2015 snapshot with continuously updating market intelligence at the lane.</a:t>
             </a:r>
             <a:endParaRPr lang="en-US" sz="950" dirty="0"/>
           </a:p>
@@ -3734,7 +3422,7 @@
                 <a:ea typeface="Calibri" pitchFamily="34" charset="-122"/>
                 <a:cs typeface="Calibri" pitchFamily="34" charset="-120"/>
               </a:rPr>
-              <a:t>XGBoost Price Model</a:t>
+              <a:t>Condition Scoring Automation</a:t>
             </a:r>
             <a:endParaRPr lang="en-US" sz="1100" dirty="0"/>
           </a:p>
@@ -3773,7 +3461,7 @@
                 <a:ea typeface="Calibri" pitchFamily="34" charset="-122"/>
                 <a:cs typeface="Calibri" pitchFamily="34" charset="-120"/>
               </a:rPr>
-              <a:t>Replace linear regression. Expected to reduce RMSE from $1,180 to under $700, especially for luxury and near-antique segments.</a:t>
+              <a:t>Build an automated condition grading tool using inspection data — eliminating subjective assessments and anchoring bids to objective scores.</a:t>
             </a:r>
             <a:endParaRPr lang="en-US" sz="950" dirty="0"/>
           </a:p>
@@ -3812,7 +3500,7 @@
                 <a:ea typeface="Calibri" pitchFamily="34" charset="-122"/>
                 <a:cs typeface="Calibri" pitchFamily="34" charset="-120"/>
               </a:rPr>
-              <a:t>Live Tableau Dashboard</a:t>
+              <a:t>Wholesale-to-Retail Model</a:t>
             </a:r>
             <a:endParaRPr lang="en-US" sz="1100" dirty="0"/>
           </a:p>
@@ -3851,7 +3539,7 @@
                 <a:ea typeface="Calibri" pitchFamily="34" charset="-122"/>
                 <a:cs typeface="Calibri" pitchFamily="34" charset="-120"/>
               </a:rPr>
-              <a:t>Connect to a real-time data feed — replace the static 2014–2015 snapshot with continuously updating market intelligence.</a:t>
+              <a:t>Integrate AutoTrader / CarGurus retail prices to build the complete wholesale-to-retail margin model — the full dealer P&amp;L picture.</a:t>
             </a:r>
             <a:endParaRPr lang="en-US" sz="950" dirty="0"/>
           </a:p>
@@ -3890,7 +3578,7 @@
                 <a:ea typeface="Calibri" pitchFamily="34" charset="-122"/>
                 <a:cs typeface="Calibri" pitchFamily="34" charset="-120"/>
               </a:rPr>
-              <a:t>Wholesale-to-Retail Model</a:t>
+              <a:t>Geographic Expansion</a:t>
             </a:r>
             <a:endParaRPr lang="en-US" sz="1100" dirty="0"/>
           </a:p>
@@ -3929,7 +3617,7 @@
                 <a:ea typeface="Calibri" pitchFamily="34" charset="-122"/>
                 <a:cs typeface="Calibri" pitchFamily="34" charset="-120"/>
               </a:rPr>
-              <a:t>Integrate AutoTrader / CarGurus retail prices to build the complete wholesale-to-retail margin model — the full dealer P&amp;L picture.</a:t>
+              <a:t>Extend the analysis to include current-year auction data from additional markets to validate the arbitrage and seasonal findings in today's conditions.</a:t>
             </a:r>
             <a:endParaRPr lang="en-US" sz="950" dirty="0"/>
           </a:p>
@@ -9202,7 +8890,7 @@
                 <a:ea typeface="Calibri" pitchFamily="34" charset="-122"/>
                 <a:cs typeface="Calibri" pitchFamily="34" charset="-120"/>
               </a:rPr>
-              <a:t>2014–2015</a:t>
+              <a:t>Model yrs 1990–2015</a:t>
             </a:r>
             <a:endParaRPr lang="en-US" sz="850" dirty="0"/>
           </a:p>
@@ -9878,7 +9566,7 @@
                 <a:ea typeface="Calibri" pitchFamily="34" charset="-122"/>
                 <a:cs typeface="Calibri" pitchFamily="34" charset="-120"/>
               </a:rPr>
-              <a:t>Coverage: 2014–2015 | US + Canadian provinces</a:t>
+              <a:t>Model years 1990–2015 | Auction sales 2014–2015 | US + Canada</a:t>
             </a:r>
             <a:endParaRPr lang="en-US" sz="850" dirty="0"/>
           </a:p>
@@ -12758,7 +12446,7 @@
               <a:buNone/>
             </a:pPr>
             <a:r>
-              <a:rPr lang="en-US" sz="2300" b="1" dirty="0">
+              <a:rPr lang="en-US" sz="2200" b="1" dirty="0">
                 <a:solidFill>
                   <a:srgbClr val="1C2951"/>
                 </a:solidFill>
@@ -12766,22 +12454,61 @@
                 <a:ea typeface="Calibri" pitchFamily="34" charset="-122"/>
                 <a:cs typeface="Calibri" pitchFamily="34" charset="-120"/>
               </a:rPr>
-              <a:t>Beyond EDA: We Tested, Modelled, and Segmented the Market</a:t>
-            </a:r>
-            <a:endParaRPr lang="en-US" sz="2300" dirty="0"/>
-          </a:p>
-        </p:txBody>
-      </p:sp>
-      <p:sp>
-        <p:nvSpPr>
-          <p:cNvPr id="3" name="Shape 1"/>
-          <p:cNvSpPr/>
-          <p:nvPr/>
-        </p:nvSpPr>
-        <p:spPr>
-          <a:xfrm>
-            <a:off x="274320" y="749808"/>
-            <a:ext cx="2743200" cy="4224528"/>
+              <a:t>We Tested the Assumptions — All Three Hold at 95% Confidence</a:t>
+            </a:r>
+            <a:endParaRPr lang="en-US" sz="2200" dirty="0"/>
+          </a:p>
+        </p:txBody>
+      </p:sp>
+      <p:sp>
+        <p:nvSpPr>
+          <p:cNvPr id="3" name="Text 1"/>
+          <p:cNvSpPr/>
+          <p:nvPr/>
+        </p:nvSpPr>
+        <p:spPr>
+          <a:xfrm>
+            <a:off x="320040" y="603504"/>
+            <a:ext cx="8503920" cy="256032"/>
+          </a:xfrm>
+          <a:prstGeom prst="rect">
+            <a:avLst/>
+          </a:prstGeom>
+          <a:noFill/>
+          <a:ln/>
+        </p:spPr>
+        <p:txBody>
+          <a:bodyPr wrap="square" rtlCol="0" anchor="ctr"/>
+          <a:lstStyle/>
+          <a:p>
+            <a:pPr indent="0" marL="0">
+              <a:buNone/>
+            </a:pPr>
+            <a:r>
+              <a:rPr lang="en-US" sz="1000" i="1" dirty="0">
+                <a:solidFill>
+                  <a:srgbClr val="4A4A4A"/>
+                </a:solidFill>
+                <a:latin typeface="Calibri" pitchFamily="34" charset="0"/>
+                <a:ea typeface="Calibri" pitchFamily="34" charset="-122"/>
+                <a:cs typeface="Calibri" pitchFamily="34" charset="-120"/>
+              </a:rPr>
+              <a:t>Formal hypothesis testing confirms that condition, mileage, and seasonality are not noise — they are statistically proven price drivers.</a:t>
+            </a:r>
+            <a:endParaRPr lang="en-US" sz="1000" dirty="0"/>
+          </a:p>
+        </p:txBody>
+      </p:sp>
+      <p:sp>
+        <p:nvSpPr>
+          <p:cNvPr id="4" name="Shape 2"/>
+          <p:cNvSpPr/>
+          <p:nvPr/>
+        </p:nvSpPr>
+        <p:spPr>
+          <a:xfrm>
+            <a:off x="274320" y="960120"/>
+            <a:ext cx="2743200" cy="4041648"/>
           </a:xfrm>
           <a:prstGeom prst="rect">
             <a:avLst/>
@@ -12806,13 +12533,13 @@
       </p:sp>
       <p:sp>
         <p:nvSpPr>
-          <p:cNvPr id="4" name="Shape 2"/>
-          <p:cNvSpPr/>
-          <p:nvPr/>
-        </p:nvSpPr>
-        <p:spPr>
-          <a:xfrm>
-            <a:off x="274320" y="749808"/>
+          <p:cNvPr id="5" name="Shape 3"/>
+          <p:cNvSpPr/>
+          <p:nvPr/>
+        </p:nvSpPr>
+        <p:spPr>
+          <a:xfrm>
+            <a:off x="274320" y="960120"/>
             <a:ext cx="2743200" cy="54864"/>
           </a:xfrm>
           <a:prstGeom prst="rect">
@@ -12831,14 +12558,337 @@
       </p:sp>
       <p:sp>
         <p:nvSpPr>
-          <p:cNvPr id="5" name="Shape 3"/>
-          <p:cNvSpPr/>
-          <p:nvPr/>
-        </p:nvSpPr>
-        <p:spPr>
-          <a:xfrm>
-            <a:off x="3246120" y="749808"/>
-            <a:ext cx="2743200" cy="4224528"/>
+          <p:cNvPr id="6" name="Shape 4"/>
+          <p:cNvSpPr/>
+          <p:nvPr/>
+        </p:nvSpPr>
+        <p:spPr>
+          <a:xfrm>
+            <a:off x="384048" y="1078992"/>
+            <a:ext cx="475488" cy="365760"/>
+          </a:xfrm>
+          <a:prstGeom prst="rect">
+            <a:avLst/>
+          </a:prstGeom>
+          <a:solidFill>
+            <a:srgbClr val="1C2951"/>
+          </a:solidFill>
+          <a:ln w="12700">
+            <a:solidFill>
+              <a:srgbClr val="1C2951"/>
+            </a:solidFill>
+            <a:prstDash val="solid"/>
+          </a:ln>
+        </p:spPr>
+      </p:sp>
+      <p:sp>
+        <p:nvSpPr>
+          <p:cNvPr id="7" name="Text 5"/>
+          <p:cNvSpPr/>
+          <p:nvPr/>
+        </p:nvSpPr>
+        <p:spPr>
+          <a:xfrm>
+            <a:off x="384048" y="1078992"/>
+            <a:ext cx="475488" cy="365760"/>
+          </a:xfrm>
+          <a:prstGeom prst="rect">
+            <a:avLst/>
+          </a:prstGeom>
+          <a:noFill/>
+          <a:ln/>
+        </p:spPr>
+        <p:txBody>
+          <a:bodyPr wrap="square" rtlCol="0" anchor="ctr"/>
+          <a:lstStyle/>
+          <a:p>
+            <a:pPr algn="ctr" indent="0" marL="0">
+              <a:buNone/>
+            </a:pPr>
+            <a:r>
+              <a:rPr lang="en-US" sz="1100" b="1" dirty="0">
+                <a:solidFill>
+                  <a:srgbClr val="FFFFFF"/>
+                </a:solidFill>
+                <a:latin typeface="Calibri" pitchFamily="34" charset="0"/>
+                <a:ea typeface="Calibri" pitchFamily="34" charset="-122"/>
+                <a:cs typeface="Calibri" pitchFamily="34" charset="-120"/>
+              </a:rPr>
+              <a:t>H1</a:t>
+            </a:r>
+            <a:endParaRPr lang="en-US" sz="1100" dirty="0"/>
+          </a:p>
+        </p:txBody>
+      </p:sp>
+      <p:sp>
+        <p:nvSpPr>
+          <p:cNvPr id="8" name="Text 6"/>
+          <p:cNvSpPr/>
+          <p:nvPr/>
+        </p:nvSpPr>
+        <p:spPr>
+          <a:xfrm>
+            <a:off x="932688" y="1078992"/>
+            <a:ext cx="1993392" cy="384048"/>
+          </a:xfrm>
+          <a:prstGeom prst="rect">
+            <a:avLst/>
+          </a:prstGeom>
+          <a:noFill/>
+          <a:ln/>
+        </p:spPr>
+        <p:txBody>
+          <a:bodyPr wrap="square" rtlCol="0" anchor="ctr"/>
+          <a:lstStyle/>
+          <a:p>
+            <a:pPr indent="0" marL="0">
+              <a:buNone/>
+            </a:pPr>
+            <a:r>
+              <a:rPr lang="en-US" sz="1100" b="1" dirty="0">
+                <a:solidFill>
+                  <a:srgbClr val="1C2951"/>
+                </a:solidFill>
+                <a:latin typeface="Calibri" pitchFamily="34" charset="0"/>
+                <a:ea typeface="Calibri" pitchFamily="34" charset="-122"/>
+                <a:cs typeface="Calibri" pitchFamily="34" charset="-120"/>
+              </a:rPr>
+              <a:t>Condition Tier Drives Price</a:t>
+            </a:r>
+            <a:endParaRPr lang="en-US" sz="1100" dirty="0"/>
+          </a:p>
+        </p:txBody>
+      </p:sp>
+      <p:sp>
+        <p:nvSpPr>
+          <p:cNvPr id="9" name="Text 7"/>
+          <p:cNvSpPr/>
+          <p:nvPr/>
+        </p:nvSpPr>
+        <p:spPr>
+          <a:xfrm>
+            <a:off x="411480" y="1572768"/>
+            <a:ext cx="2468880" cy="237744"/>
+          </a:xfrm>
+          <a:prstGeom prst="rect">
+            <a:avLst/>
+          </a:prstGeom>
+          <a:noFill/>
+          <a:ln/>
+        </p:spPr>
+        <p:txBody>
+          <a:bodyPr wrap="square" rtlCol="0" anchor="ctr"/>
+          <a:lstStyle/>
+          <a:p>
+            <a:pPr indent="0" marL="0">
+              <a:buNone/>
+            </a:pPr>
+            <a:r>
+              <a:rPr lang="en-US" sz="900" i="1" dirty="0">
+                <a:solidFill>
+                  <a:srgbClr val="4A4A4A"/>
+                </a:solidFill>
+                <a:latin typeface="Calibri" pitchFamily="34" charset="0"/>
+                <a:ea typeface="Calibri" pitchFamily="34" charset="-122"/>
+                <a:cs typeface="Calibri" pitchFamily="34" charset="-120"/>
+              </a:rPr>
+              <a:t>One-Way ANOVA</a:t>
+            </a:r>
+            <a:endParaRPr lang="en-US" sz="900" dirty="0"/>
+          </a:p>
+        </p:txBody>
+      </p:sp>
+      <p:sp>
+        <p:nvSpPr>
+          <p:cNvPr id="10" name="Text 8"/>
+          <p:cNvSpPr/>
+          <p:nvPr/>
+        </p:nvSpPr>
+        <p:spPr>
+          <a:xfrm>
+            <a:off x="411480" y="1874520"/>
+            <a:ext cx="2468880" cy="548640"/>
+          </a:xfrm>
+          <a:prstGeom prst="rect">
+            <a:avLst/>
+          </a:prstGeom>
+          <a:noFill/>
+          <a:ln/>
+        </p:spPr>
+        <p:txBody>
+          <a:bodyPr wrap="square" rtlCol="0" anchor="ctr"/>
+          <a:lstStyle/>
+          <a:p>
+            <a:pPr indent="0" marL="0">
+              <a:buNone/>
+            </a:pPr>
+            <a:r>
+              <a:rPr lang="en-US" sz="2800" b="1" dirty="0">
+                <a:solidFill>
+                  <a:srgbClr val="1C2951"/>
+                </a:solidFill>
+                <a:latin typeface="Calibri" pitchFamily="34" charset="0"/>
+                <a:ea typeface="Calibri" pitchFamily="34" charset="-122"/>
+                <a:cs typeface="Calibri" pitchFamily="34" charset="-120"/>
+              </a:rPr>
+              <a:t>F = 44,299</a:t>
+            </a:r>
+            <a:endParaRPr lang="en-US" sz="2800" dirty="0"/>
+          </a:p>
+        </p:txBody>
+      </p:sp>
+      <p:sp>
+        <p:nvSpPr>
+          <p:cNvPr id="11" name="Text 9"/>
+          <p:cNvSpPr/>
+          <p:nvPr/>
+        </p:nvSpPr>
+        <p:spPr>
+          <a:xfrm>
+            <a:off x="411480" y="2395728"/>
+            <a:ext cx="2468880" cy="274320"/>
+          </a:xfrm>
+          <a:prstGeom prst="rect">
+            <a:avLst/>
+          </a:prstGeom>
+          <a:noFill/>
+          <a:ln/>
+        </p:spPr>
+        <p:txBody>
+          <a:bodyPr wrap="square" rtlCol="0" anchor="ctr"/>
+          <a:lstStyle/>
+          <a:p>
+            <a:pPr indent="0" marL="0">
+              <a:buNone/>
+            </a:pPr>
+            <a:r>
+              <a:rPr lang="en-US" sz="1100" dirty="0">
+                <a:solidFill>
+                  <a:srgbClr val="4A4A4A"/>
+                </a:solidFill>
+                <a:latin typeface="Calibri" pitchFamily="34" charset="0"/>
+                <a:ea typeface="Calibri" pitchFamily="34" charset="-122"/>
+                <a:cs typeface="Calibri" pitchFamily="34" charset="-120"/>
+              </a:rPr>
+              <a:t>p &lt; 0.001</a:t>
+            </a:r>
+            <a:endParaRPr lang="en-US" sz="1100" dirty="0"/>
+          </a:p>
+        </p:txBody>
+      </p:sp>
+      <p:sp>
+        <p:nvSpPr>
+          <p:cNvPr id="12" name="Shape 10"/>
+          <p:cNvSpPr/>
+          <p:nvPr/>
+        </p:nvSpPr>
+        <p:spPr>
+          <a:xfrm>
+            <a:off x="411480" y="2743200"/>
+            <a:ext cx="1828800" cy="310896"/>
+          </a:xfrm>
+          <a:prstGeom prst="rect">
+            <a:avLst/>
+          </a:prstGeom>
+          <a:solidFill>
+            <a:srgbClr val="1E8449"/>
+          </a:solidFill>
+          <a:ln w="12700">
+            <a:solidFill>
+              <a:srgbClr val="1E8449"/>
+            </a:solidFill>
+            <a:prstDash val="solid"/>
+          </a:ln>
+        </p:spPr>
+      </p:sp>
+      <p:sp>
+        <p:nvSpPr>
+          <p:cNvPr id="13" name="Text 11"/>
+          <p:cNvSpPr/>
+          <p:nvPr/>
+        </p:nvSpPr>
+        <p:spPr>
+          <a:xfrm>
+            <a:off x="411480" y="2743200"/>
+            <a:ext cx="1828800" cy="310896"/>
+          </a:xfrm>
+          <a:prstGeom prst="rect">
+            <a:avLst/>
+          </a:prstGeom>
+          <a:noFill/>
+          <a:ln/>
+        </p:spPr>
+        <p:txBody>
+          <a:bodyPr wrap="square" rtlCol="0" anchor="ctr"/>
+          <a:lstStyle/>
+          <a:p>
+            <a:pPr algn="ctr" indent="0" marL="0">
+              <a:buNone/>
+            </a:pPr>
+            <a:r>
+              <a:rPr lang="en-US" sz="1000" b="1" dirty="0">
+                <a:solidFill>
+                  <a:srgbClr val="FFFFFF"/>
+                </a:solidFill>
+                <a:latin typeface="Calibri" pitchFamily="34" charset="0"/>
+                <a:ea typeface="Calibri" pitchFamily="34" charset="-122"/>
+                <a:cs typeface="Calibri" pitchFamily="34" charset="-120"/>
+              </a:rPr>
+              <a:t>REJECT H0</a:t>
+            </a:r>
+            <a:endParaRPr lang="en-US" sz="1000" dirty="0"/>
+          </a:p>
+        </p:txBody>
+      </p:sp>
+      <p:sp>
+        <p:nvSpPr>
+          <p:cNvPr id="14" name="Text 12"/>
+          <p:cNvSpPr/>
+          <p:nvPr/>
+        </p:nvSpPr>
+        <p:spPr>
+          <a:xfrm>
+            <a:off x="411480" y="3145536"/>
+            <a:ext cx="2487168" cy="1700784"/>
+          </a:xfrm>
+          <a:prstGeom prst="rect">
+            <a:avLst/>
+          </a:prstGeom>
+          <a:noFill/>
+          <a:ln/>
+        </p:spPr>
+        <p:txBody>
+          <a:bodyPr wrap="square" rtlCol="0" anchor="t"/>
+          <a:lstStyle/>
+          <a:p>
+            <a:pPr indent="0" marL="0">
+              <a:buNone/>
+            </a:pPr>
+            <a:r>
+              <a:rPr lang="en-US" sz="950" dirty="0">
+                <a:solidFill>
+                  <a:srgbClr val="4A4A4A"/>
+                </a:solidFill>
+                <a:latin typeface="Calibri" pitchFamily="34" charset="0"/>
+                <a:ea typeface="Calibri" pitchFamily="34" charset="-122"/>
+                <a:cs typeface="Calibri" pitchFamily="34" charset="-120"/>
+              </a:rPr>
+              <a:t>Moving a vehicle up one condition tier adds between $2,000 and $3,500 to its selling price. The effect is massive and consistent across all makes.</a:t>
+            </a:r>
+            <a:endParaRPr lang="en-US" sz="950" dirty="0"/>
+          </a:p>
+        </p:txBody>
+      </p:sp>
+      <p:sp>
+        <p:nvSpPr>
+          <p:cNvPr id="15" name="Shape 13"/>
+          <p:cNvSpPr/>
+          <p:nvPr/>
+        </p:nvSpPr>
+        <p:spPr>
+          <a:xfrm>
+            <a:off x="3246120" y="960120"/>
+            <a:ext cx="2743200" cy="4041648"/>
           </a:xfrm>
           <a:prstGeom prst="rect">
             <a:avLst/>
@@ -12863,13 +12913,13 @@
       </p:sp>
       <p:sp>
         <p:nvSpPr>
-          <p:cNvPr id="6" name="Shape 4"/>
-          <p:cNvSpPr/>
-          <p:nvPr/>
-        </p:nvSpPr>
-        <p:spPr>
-          <a:xfrm>
-            <a:off x="3246120" y="749808"/>
+          <p:cNvPr id="16" name="Shape 14"/>
+          <p:cNvSpPr/>
+          <p:nvPr/>
+        </p:nvSpPr>
+        <p:spPr>
+          <a:xfrm>
+            <a:off x="3246120" y="960120"/>
             <a:ext cx="2743200" cy="54864"/>
           </a:xfrm>
           <a:prstGeom prst="rect">
@@ -12888,14 +12938,337 @@
       </p:sp>
       <p:sp>
         <p:nvSpPr>
-          <p:cNvPr id="7" name="Shape 5"/>
-          <p:cNvSpPr/>
-          <p:nvPr/>
-        </p:nvSpPr>
-        <p:spPr>
-          <a:xfrm>
-            <a:off x="6217920" y="749808"/>
-            <a:ext cx="2743200" cy="4224528"/>
+          <p:cNvPr id="17" name="Shape 15"/>
+          <p:cNvSpPr/>
+          <p:nvPr/>
+        </p:nvSpPr>
+        <p:spPr>
+          <a:xfrm>
+            <a:off x="3355848" y="1078992"/>
+            <a:ext cx="475488" cy="365760"/>
+          </a:xfrm>
+          <a:prstGeom prst="rect">
+            <a:avLst/>
+          </a:prstGeom>
+          <a:solidFill>
+            <a:srgbClr val="C0392B"/>
+          </a:solidFill>
+          <a:ln w="12700">
+            <a:solidFill>
+              <a:srgbClr val="C0392B"/>
+            </a:solidFill>
+            <a:prstDash val="solid"/>
+          </a:ln>
+        </p:spPr>
+      </p:sp>
+      <p:sp>
+        <p:nvSpPr>
+          <p:cNvPr id="18" name="Text 16"/>
+          <p:cNvSpPr/>
+          <p:nvPr/>
+        </p:nvSpPr>
+        <p:spPr>
+          <a:xfrm>
+            <a:off x="3355848" y="1078992"/>
+            <a:ext cx="475488" cy="365760"/>
+          </a:xfrm>
+          <a:prstGeom prst="rect">
+            <a:avLst/>
+          </a:prstGeom>
+          <a:noFill/>
+          <a:ln/>
+        </p:spPr>
+        <p:txBody>
+          <a:bodyPr wrap="square" rtlCol="0" anchor="ctr"/>
+          <a:lstStyle/>
+          <a:p>
+            <a:pPr algn="ctr" indent="0" marL="0">
+              <a:buNone/>
+            </a:pPr>
+            <a:r>
+              <a:rPr lang="en-US" sz="1100" b="1" dirty="0">
+                <a:solidFill>
+                  <a:srgbClr val="FFFFFF"/>
+                </a:solidFill>
+                <a:latin typeface="Calibri" pitchFamily="34" charset="0"/>
+                <a:ea typeface="Calibri" pitchFamily="34" charset="-122"/>
+                <a:cs typeface="Calibri" pitchFamily="34" charset="-120"/>
+              </a:rPr>
+              <a:t>H2</a:t>
+            </a:r>
+            <a:endParaRPr lang="en-US" sz="1100" dirty="0"/>
+          </a:p>
+        </p:txBody>
+      </p:sp>
+      <p:sp>
+        <p:nvSpPr>
+          <p:cNvPr id="19" name="Text 17"/>
+          <p:cNvSpPr/>
+          <p:nvPr/>
+        </p:nvSpPr>
+        <p:spPr>
+          <a:xfrm>
+            <a:off x="3904488" y="1078992"/>
+            <a:ext cx="1993392" cy="384048"/>
+          </a:xfrm>
+          <a:prstGeom prst="rect">
+            <a:avLst/>
+          </a:prstGeom>
+          <a:noFill/>
+          <a:ln/>
+        </p:spPr>
+        <p:txBody>
+          <a:bodyPr wrap="square" rtlCol="0" anchor="ctr"/>
+          <a:lstStyle/>
+          <a:p>
+            <a:pPr indent="0" marL="0">
+              <a:buNone/>
+            </a:pPr>
+            <a:r>
+              <a:rPr lang="en-US" sz="1100" b="1" dirty="0">
+                <a:solidFill>
+                  <a:srgbClr val="1C2951"/>
+                </a:solidFill>
+                <a:latin typeface="Calibri" pitchFamily="34" charset="0"/>
+                <a:ea typeface="Calibri" pitchFamily="34" charset="-122"/>
+                <a:cs typeface="Calibri" pitchFamily="34" charset="-120"/>
+              </a:rPr>
+              <a:t>Mileage Negatively Predicts Price</a:t>
+            </a:r>
+            <a:endParaRPr lang="en-US" sz="1100" dirty="0"/>
+          </a:p>
+        </p:txBody>
+      </p:sp>
+      <p:sp>
+        <p:nvSpPr>
+          <p:cNvPr id="20" name="Text 18"/>
+          <p:cNvSpPr/>
+          <p:nvPr/>
+        </p:nvSpPr>
+        <p:spPr>
+          <a:xfrm>
+            <a:off x="3383280" y="1572768"/>
+            <a:ext cx="2468880" cy="237744"/>
+          </a:xfrm>
+          <a:prstGeom prst="rect">
+            <a:avLst/>
+          </a:prstGeom>
+          <a:noFill/>
+          <a:ln/>
+        </p:spPr>
+        <p:txBody>
+          <a:bodyPr wrap="square" rtlCol="0" anchor="ctr"/>
+          <a:lstStyle/>
+          <a:p>
+            <a:pPr indent="0" marL="0">
+              <a:buNone/>
+            </a:pPr>
+            <a:r>
+              <a:rPr lang="en-US" sz="900" i="1" dirty="0">
+                <a:solidFill>
+                  <a:srgbClr val="4A4A4A"/>
+                </a:solidFill>
+                <a:latin typeface="Calibri" pitchFamily="34" charset="0"/>
+                <a:ea typeface="Calibri" pitchFamily="34" charset="-122"/>
+                <a:cs typeface="Calibri" pitchFamily="34" charset="-120"/>
+              </a:rPr>
+              <a:t>Pearson Correlation</a:t>
+            </a:r>
+            <a:endParaRPr lang="en-US" sz="900" dirty="0"/>
+          </a:p>
+        </p:txBody>
+      </p:sp>
+      <p:sp>
+        <p:nvSpPr>
+          <p:cNvPr id="21" name="Text 19"/>
+          <p:cNvSpPr/>
+          <p:nvPr/>
+        </p:nvSpPr>
+        <p:spPr>
+          <a:xfrm>
+            <a:off x="3383280" y="1874520"/>
+            <a:ext cx="2468880" cy="548640"/>
+          </a:xfrm>
+          <a:prstGeom prst="rect">
+            <a:avLst/>
+          </a:prstGeom>
+          <a:noFill/>
+          <a:ln/>
+        </p:spPr>
+        <p:txBody>
+          <a:bodyPr wrap="square" rtlCol="0" anchor="ctr"/>
+          <a:lstStyle/>
+          <a:p>
+            <a:pPr indent="0" marL="0">
+              <a:buNone/>
+            </a:pPr>
+            <a:r>
+              <a:rPr lang="en-US" sz="2800" b="1" dirty="0">
+                <a:solidFill>
+                  <a:srgbClr val="C0392B"/>
+                </a:solidFill>
+                <a:latin typeface="Calibri" pitchFamily="34" charset="0"/>
+                <a:ea typeface="Calibri" pitchFamily="34" charset="-122"/>
+                <a:cs typeface="Calibri" pitchFamily="34" charset="-120"/>
+              </a:rPr>
+              <a:t>r = −0.31</a:t>
+            </a:r>
+            <a:endParaRPr lang="en-US" sz="2800" dirty="0"/>
+          </a:p>
+        </p:txBody>
+      </p:sp>
+      <p:sp>
+        <p:nvSpPr>
+          <p:cNvPr id="22" name="Text 20"/>
+          <p:cNvSpPr/>
+          <p:nvPr/>
+        </p:nvSpPr>
+        <p:spPr>
+          <a:xfrm>
+            <a:off x="3383280" y="2395728"/>
+            <a:ext cx="2468880" cy="274320"/>
+          </a:xfrm>
+          <a:prstGeom prst="rect">
+            <a:avLst/>
+          </a:prstGeom>
+          <a:noFill/>
+          <a:ln/>
+        </p:spPr>
+        <p:txBody>
+          <a:bodyPr wrap="square" rtlCol="0" anchor="ctr"/>
+          <a:lstStyle/>
+          <a:p>
+            <a:pPr indent="0" marL="0">
+              <a:buNone/>
+            </a:pPr>
+            <a:r>
+              <a:rPr lang="en-US" sz="1100" dirty="0">
+                <a:solidFill>
+                  <a:srgbClr val="4A4A4A"/>
+                </a:solidFill>
+                <a:latin typeface="Calibri" pitchFamily="34" charset="0"/>
+                <a:ea typeface="Calibri" pitchFamily="34" charset="-122"/>
+                <a:cs typeface="Calibri" pitchFamily="34" charset="-120"/>
+              </a:rPr>
+              <a:t>p &lt; 0.001</a:t>
+            </a:r>
+            <a:endParaRPr lang="en-US" sz="1100" dirty="0"/>
+          </a:p>
+        </p:txBody>
+      </p:sp>
+      <p:sp>
+        <p:nvSpPr>
+          <p:cNvPr id="23" name="Shape 21"/>
+          <p:cNvSpPr/>
+          <p:nvPr/>
+        </p:nvSpPr>
+        <p:spPr>
+          <a:xfrm>
+            <a:off x="3383280" y="2743200"/>
+            <a:ext cx="1828800" cy="310896"/>
+          </a:xfrm>
+          <a:prstGeom prst="rect">
+            <a:avLst/>
+          </a:prstGeom>
+          <a:solidFill>
+            <a:srgbClr val="1E8449"/>
+          </a:solidFill>
+          <a:ln w="12700">
+            <a:solidFill>
+              <a:srgbClr val="1E8449"/>
+            </a:solidFill>
+            <a:prstDash val="solid"/>
+          </a:ln>
+        </p:spPr>
+      </p:sp>
+      <p:sp>
+        <p:nvSpPr>
+          <p:cNvPr id="24" name="Text 22"/>
+          <p:cNvSpPr/>
+          <p:nvPr/>
+        </p:nvSpPr>
+        <p:spPr>
+          <a:xfrm>
+            <a:off x="3383280" y="2743200"/>
+            <a:ext cx="1828800" cy="310896"/>
+          </a:xfrm>
+          <a:prstGeom prst="rect">
+            <a:avLst/>
+          </a:prstGeom>
+          <a:noFill/>
+          <a:ln/>
+        </p:spPr>
+        <p:txBody>
+          <a:bodyPr wrap="square" rtlCol="0" anchor="ctr"/>
+          <a:lstStyle/>
+          <a:p>
+            <a:pPr algn="ctr" indent="0" marL="0">
+              <a:buNone/>
+            </a:pPr>
+            <a:r>
+              <a:rPr lang="en-US" sz="1000" b="1" dirty="0">
+                <a:solidFill>
+                  <a:srgbClr val="FFFFFF"/>
+                </a:solidFill>
+                <a:latin typeface="Calibri" pitchFamily="34" charset="0"/>
+                <a:ea typeface="Calibri" pitchFamily="34" charset="-122"/>
+                <a:cs typeface="Calibri" pitchFamily="34" charset="-120"/>
+              </a:rPr>
+              <a:t>REJECT H0</a:t>
+            </a:r>
+            <a:endParaRPr lang="en-US" sz="1000" dirty="0"/>
+          </a:p>
+        </p:txBody>
+      </p:sp>
+      <p:sp>
+        <p:nvSpPr>
+          <p:cNvPr id="25" name="Text 23"/>
+          <p:cNvSpPr/>
+          <p:nvPr/>
+        </p:nvSpPr>
+        <p:spPr>
+          <a:xfrm>
+            <a:off x="3383280" y="3145536"/>
+            <a:ext cx="2487168" cy="1700784"/>
+          </a:xfrm>
+          <a:prstGeom prst="rect">
+            <a:avLst/>
+          </a:prstGeom>
+          <a:noFill/>
+          <a:ln/>
+        </p:spPr>
+        <p:txBody>
+          <a:bodyPr wrap="square" rtlCol="0" anchor="t"/>
+          <a:lstStyle/>
+          <a:p>
+            <a:pPr indent="0" marL="0">
+              <a:buNone/>
+            </a:pPr>
+            <a:r>
+              <a:rPr lang="en-US" sz="950" dirty="0">
+                <a:solidFill>
+                  <a:srgbClr val="4A4A4A"/>
+                </a:solidFill>
+                <a:latin typeface="Calibri" pitchFamily="34" charset="0"/>
+                <a:ea typeface="Calibri" pitchFamily="34" charset="-122"/>
+                <a:cs typeface="Calibri" pitchFamily="34" charset="-120"/>
+              </a:rPr>
+              <a:t>Every 10,000 additional miles reduces selling price by approximately $430. This relationship is linear, consistent, and directly usable at the bid table.</a:t>
+            </a:r>
+            <a:endParaRPr lang="en-US" sz="950" dirty="0"/>
+          </a:p>
+        </p:txBody>
+      </p:sp>
+      <p:sp>
+        <p:nvSpPr>
+          <p:cNvPr id="26" name="Shape 24"/>
+          <p:cNvSpPr/>
+          <p:nvPr/>
+        </p:nvSpPr>
+        <p:spPr>
+          <a:xfrm>
+            <a:off x="6217920" y="960120"/>
+            <a:ext cx="2743200" cy="4041648"/>
           </a:xfrm>
           <a:prstGeom prst="rect">
             <a:avLst/>
@@ -12920,13 +13293,13 @@
       </p:sp>
       <p:sp>
         <p:nvSpPr>
-          <p:cNvPr id="8" name="Shape 6"/>
-          <p:cNvSpPr/>
-          <p:nvPr/>
-        </p:nvSpPr>
-        <p:spPr>
-          <a:xfrm>
-            <a:off x="6217920" y="749808"/>
+          <p:cNvPr id="27" name="Shape 25"/>
+          <p:cNvSpPr/>
+          <p:nvPr/>
+        </p:nvSpPr>
+        <p:spPr>
+          <a:xfrm>
+            <a:off x="6217920" y="960120"/>
             <a:ext cx="2743200" cy="54864"/>
           </a:xfrm>
           <a:prstGeom prst="rect">
@@ -12945,286 +13318,24 @@
       </p:sp>
       <p:sp>
         <p:nvSpPr>
-          <p:cNvPr id="9" name="Text 7"/>
-          <p:cNvSpPr/>
-          <p:nvPr/>
-        </p:nvSpPr>
-        <p:spPr>
-          <a:xfrm>
-            <a:off x="411480" y="841248"/>
-            <a:ext cx="2468880" cy="274320"/>
-          </a:xfrm>
-          <a:prstGeom prst="rect">
-            <a:avLst/>
-          </a:prstGeom>
-          <a:noFill/>
-          <a:ln/>
-        </p:spPr>
-        <p:txBody>
-          <a:bodyPr wrap="square" rtlCol="0" anchor="ctr"/>
-          <a:lstStyle/>
-          <a:p>
-            <a:pPr indent="0" marL="0">
-              <a:buNone/>
-            </a:pPr>
-            <a:r>
-              <a:rPr lang="en-US" sz="1300" b="1" dirty="0">
-                <a:solidFill>
-                  <a:srgbClr val="1C2951"/>
-                </a:solidFill>
-                <a:latin typeface="Calibri" pitchFamily="34" charset="0"/>
-                <a:ea typeface="Calibri" pitchFamily="34" charset="-122"/>
-                <a:cs typeface="Calibri" pitchFamily="34" charset="-120"/>
-              </a:rPr>
-              <a:t>Regression Model</a:t>
-            </a:r>
-            <a:endParaRPr lang="en-US" sz="1300" dirty="0"/>
-          </a:p>
-        </p:txBody>
-      </p:sp>
-      <p:sp>
-        <p:nvSpPr>
-          <p:cNvPr id="10" name="Text 8"/>
-          <p:cNvSpPr/>
-          <p:nvPr/>
-        </p:nvSpPr>
-        <p:spPr>
-          <a:xfrm>
-            <a:off x="411480" y="1115568"/>
-            <a:ext cx="2468880" cy="256032"/>
-          </a:xfrm>
-          <a:prstGeom prst="rect">
-            <a:avLst/>
-          </a:prstGeom>
-          <a:noFill/>
-          <a:ln/>
-        </p:spPr>
-        <p:txBody>
-          <a:bodyPr wrap="square" rtlCol="0" anchor="ctr"/>
-          <a:lstStyle/>
-          <a:p>
-            <a:pPr indent="0" marL="0">
-              <a:buNone/>
-            </a:pPr>
-            <a:r>
-              <a:rPr lang="en-US" sz="950" i="1" dirty="0">
-                <a:solidFill>
-                  <a:srgbClr val="C0392B"/>
-                </a:solidFill>
-                <a:latin typeface="Calibri" pitchFamily="34" charset="0"/>
-                <a:ea typeface="Calibri" pitchFamily="34" charset="-122"/>
-                <a:cs typeface="Calibri" pitchFamily="34" charset="-120"/>
-              </a:rPr>
-              <a:t>MMR + 3 Factors = 94% Accuracy</a:t>
-            </a:r>
-            <a:endParaRPr lang="en-US" sz="950" dirty="0"/>
-          </a:p>
-        </p:txBody>
-      </p:sp>
-      <p:graphicFrame>
-        <p:nvGraphicFramePr>
-          <p:cNvPr id="11" name="Chart 0" descr=""/>
-          <p:cNvGraphicFramePr/>
-          <p:nvPr/>
-        </p:nvGraphicFramePr>
-        <p:xfrm>
-          <a:off x="320040" y="1444752"/>
-          <a:ext cx="2651760" cy="1691640"/>
-        </p:xfrm>
-        <a:graphic xmlns:a="http://schemas.openxmlformats.org/drawingml/2006/main">
-          <a:graphicData uri="http://schemas.openxmlformats.org/drawingml/2006/chart">
-            <c:chart xmlns:c="http://schemas.openxmlformats.org/drawingml/2006/chart" r:id="rId1"/>
-          </a:graphicData>
-        </a:graphic>
-      </p:graphicFrame>
-      <p:sp>
-        <p:nvSpPr>
-          <p:cNvPr id="12" name="Text 9"/>
-          <p:cNvSpPr/>
-          <p:nvPr/>
-        </p:nvSpPr>
-        <p:spPr>
-          <a:xfrm>
-            <a:off x="411480" y="3200400"/>
-            <a:ext cx="2468880" cy="1664208"/>
-          </a:xfrm>
-          <a:prstGeom prst="rect">
-            <a:avLst/>
-          </a:prstGeom>
-          <a:noFill/>
-          <a:ln/>
-        </p:spPr>
-        <p:txBody>
-          <a:bodyPr wrap="square" rtlCol="0" anchor="ctr"/>
-          <a:lstStyle/>
-          <a:p>
-            <a:pPr indent="0" marL="0">
-              <a:buNone/>
-            </a:pPr>
-            <a:r>
-              <a:rPr lang="en-US" sz="1000" b="1" dirty="0">
-                <a:solidFill>
-                  <a:srgbClr val="1C2951"/>
-                </a:solidFill>
-                <a:latin typeface="Calibri" pitchFamily="34" charset="0"/>
-                <a:ea typeface="Calibri" pitchFamily="34" charset="-122"/>
-                <a:cs typeface="Calibri" pitchFamily="34" charset="-120"/>
-              </a:rPr>
-              <a:t>R² = 0.94</a:t>
-            </a:r>
-            <a:endParaRPr lang="en-US" sz="1000" dirty="0"/>
-          </a:p>
-          <a:p>
-            <a:pPr indent="0" marL="0">
-              <a:buNone/>
-            </a:pPr>
-            <a:r>
-              <a:rPr lang="en-US" sz="1000" dirty="0">
-                <a:solidFill>
-                  <a:srgbClr val="4A4A4A"/>
-                </a:solidFill>
-                <a:latin typeface="Calibri" pitchFamily="34" charset="0"/>
-                <a:ea typeface="Calibri" pitchFamily="34" charset="-122"/>
-                <a:cs typeface="Calibri" pitchFamily="34" charset="-120"/>
-              </a:rPr>
-              <a:t>RMSE  ≈  $1,180</a:t>
-            </a:r>
-            <a:endParaRPr lang="en-US" sz="1000" dirty="0"/>
-          </a:p>
-          <a:p>
-            <a:pPr indent="0" marL="0">
-              <a:buNone/>
-            </a:pPr>
-            <a:r>
-              <a:rPr lang="en-US" sz="1000" dirty="0">
-                <a:solidFill>
-                  <a:srgbClr val="4A4A4A"/>
-                </a:solidFill>
-                <a:latin typeface="Calibri" pitchFamily="34" charset="0"/>
-                <a:ea typeface="Calibri" pitchFamily="34" charset="-122"/>
-                <a:cs typeface="Calibri" pitchFamily="34" charset="-120"/>
-              </a:rPr>
-              <a:t>MAE   ≈  $740</a:t>
-            </a:r>
-            <a:endParaRPr lang="en-US" sz="1000" dirty="0"/>
-          </a:p>
-          <a:p>
-            <a:pPr indent="0" marL="0">
-              <a:buNone/>
-            </a:pPr>
-            <a:r>
-              <a:rPr lang="en-US" sz="1000" i="1" dirty="0">
-                <a:solidFill>
-                  <a:srgbClr val="4A4A4A"/>
-                </a:solidFill>
-                <a:latin typeface="Calibri" pitchFamily="34" charset="0"/>
-                <a:ea typeface="Calibri" pitchFamily="34" charset="-122"/>
-                <a:cs typeface="Calibri" pitchFamily="34" charset="-120"/>
-              </a:rPr>
-              <a:t>Library: scikit-learn, statsmodels</a:t>
-            </a:r>
-            <a:endParaRPr lang="en-US" sz="1000" dirty="0"/>
-          </a:p>
-        </p:txBody>
-      </p:sp>
-      <p:sp>
-        <p:nvSpPr>
-          <p:cNvPr id="13" name="Text 10"/>
-          <p:cNvSpPr/>
-          <p:nvPr/>
-        </p:nvSpPr>
-        <p:spPr>
-          <a:xfrm>
-            <a:off x="3383280" y="841248"/>
-            <a:ext cx="2468880" cy="274320"/>
-          </a:xfrm>
-          <a:prstGeom prst="rect">
-            <a:avLst/>
-          </a:prstGeom>
-          <a:noFill/>
-          <a:ln/>
-        </p:spPr>
-        <p:txBody>
-          <a:bodyPr wrap="square" rtlCol="0" anchor="ctr"/>
-          <a:lstStyle/>
-          <a:p>
-            <a:pPr indent="0" marL="0">
-              <a:buNone/>
-            </a:pPr>
-            <a:r>
-              <a:rPr lang="en-US" sz="1300" b="1" dirty="0">
-                <a:solidFill>
-                  <a:srgbClr val="1C2951"/>
-                </a:solidFill>
-                <a:latin typeface="Calibri" pitchFamily="34" charset="0"/>
-                <a:ea typeface="Calibri" pitchFamily="34" charset="-122"/>
-                <a:cs typeface="Calibri" pitchFamily="34" charset="-120"/>
-              </a:rPr>
-              <a:t>Hypothesis Testing</a:t>
-            </a:r>
-            <a:endParaRPr lang="en-US" sz="1300" dirty="0"/>
-          </a:p>
-        </p:txBody>
-      </p:sp>
-      <p:sp>
-        <p:nvSpPr>
-          <p:cNvPr id="14" name="Text 11"/>
-          <p:cNvSpPr/>
-          <p:nvPr/>
-        </p:nvSpPr>
-        <p:spPr>
-          <a:xfrm>
-            <a:off x="3383280" y="1115568"/>
-            <a:ext cx="2468880" cy="256032"/>
-          </a:xfrm>
-          <a:prstGeom prst="rect">
-            <a:avLst/>
-          </a:prstGeom>
-          <a:noFill/>
-          <a:ln/>
-        </p:spPr>
-        <p:txBody>
-          <a:bodyPr wrap="square" rtlCol="0" anchor="ctr"/>
-          <a:lstStyle/>
-          <a:p>
-            <a:pPr indent="0" marL="0">
-              <a:buNone/>
-            </a:pPr>
-            <a:r>
-              <a:rPr lang="en-US" sz="950" i="1" dirty="0">
-                <a:solidFill>
-                  <a:srgbClr val="C0392B"/>
-                </a:solidFill>
-                <a:latin typeface="Calibri" pitchFamily="34" charset="0"/>
-                <a:ea typeface="Calibri" pitchFamily="34" charset="-122"/>
-                <a:cs typeface="Calibri" pitchFamily="34" charset="-120"/>
-              </a:rPr>
-              <a:t>3 Assumptions — All Statistically Confirmed</a:t>
-            </a:r>
-            <a:endParaRPr lang="en-US" sz="950" dirty="0"/>
-          </a:p>
-        </p:txBody>
-      </p:sp>
-      <p:sp>
-        <p:nvSpPr>
-          <p:cNvPr id="15" name="Shape 12"/>
-          <p:cNvSpPr/>
-          <p:nvPr/>
-        </p:nvSpPr>
-        <p:spPr>
-          <a:xfrm>
-            <a:off x="3383280" y="1508760"/>
-            <a:ext cx="2468880" cy="914400"/>
+          <p:cNvPr id="28" name="Shape 26"/>
+          <p:cNvSpPr/>
+          <p:nvPr/>
+        </p:nvSpPr>
+        <p:spPr>
+          <a:xfrm>
+            <a:off x="6327648" y="1078992"/>
+            <a:ext cx="475488" cy="365760"/>
           </a:xfrm>
           <a:prstGeom prst="rect">
             <a:avLst/>
           </a:prstGeom>
           <a:solidFill>
-            <a:srgbClr val="FFFFFF"/>
+            <a:srgbClr val="E67E22"/>
           </a:solidFill>
-          <a:ln w="6350">
+          <a:ln w="12700">
             <a:solidFill>
-              <a:srgbClr val="D5D8DC"/>
+              <a:srgbClr val="E67E22"/>
             </a:solidFill>
             <a:prstDash val="solid"/>
           </a:ln>
@@ -13232,14 +13343,14 @@
       </p:sp>
       <p:sp>
         <p:nvSpPr>
-          <p:cNvPr id="16" name="Text 13"/>
-          <p:cNvSpPr/>
-          <p:nvPr/>
-        </p:nvSpPr>
-        <p:spPr>
-          <a:xfrm>
-            <a:off x="3493008" y="1563624"/>
-            <a:ext cx="2249424" cy="365760"/>
+          <p:cNvPr id="29" name="Text 27"/>
+          <p:cNvSpPr/>
+          <p:nvPr/>
+        </p:nvSpPr>
+        <p:spPr>
+          <a:xfrm>
+            <a:off x="6327648" y="1078992"/>
+            <a:ext cx="475488" cy="365760"/>
           </a:xfrm>
           <a:prstGeom prst="rect">
             <a:avLst/>
@@ -13251,11 +13362,50 @@
           <a:bodyPr wrap="square" rtlCol="0" anchor="ctr"/>
           <a:lstStyle/>
           <a:p>
+            <a:pPr algn="ctr" indent="0" marL="0">
+              <a:buNone/>
+            </a:pPr>
+            <a:r>
+              <a:rPr lang="en-US" sz="1100" b="1" dirty="0">
+                <a:solidFill>
+                  <a:srgbClr val="FFFFFF"/>
+                </a:solidFill>
+                <a:latin typeface="Calibri" pitchFamily="34" charset="0"/>
+                <a:ea typeface="Calibri" pitchFamily="34" charset="-122"/>
+                <a:cs typeface="Calibri" pitchFamily="34" charset="-120"/>
+              </a:rPr>
+              <a:t>H3</a:t>
+            </a:r>
+            <a:endParaRPr lang="en-US" sz="1100" dirty="0"/>
+          </a:p>
+        </p:txBody>
+      </p:sp>
+      <p:sp>
+        <p:nvSpPr>
+          <p:cNvPr id="30" name="Text 28"/>
+          <p:cNvSpPr/>
+          <p:nvPr/>
+        </p:nvSpPr>
+        <p:spPr>
+          <a:xfrm>
+            <a:off x="6876288" y="1078992"/>
+            <a:ext cx="1993392" cy="384048"/>
+          </a:xfrm>
+          <a:prstGeom prst="rect">
+            <a:avLst/>
+          </a:prstGeom>
+          <a:noFill/>
+          <a:ln/>
+        </p:spPr>
+        <p:txBody>
+          <a:bodyPr wrap="square" rtlCol="0" anchor="ctr"/>
+          <a:lstStyle/>
+          <a:p>
             <a:pPr indent="0" marL="0">
               <a:buNone/>
             </a:pPr>
             <a:r>
-              <a:rPr lang="en-US" sz="900" b="1" dirty="0">
+              <a:rPr lang="en-US" sz="1100" b="1" dirty="0">
                 <a:solidFill>
                   <a:srgbClr val="1C2951"/>
                 </a:solidFill>
@@ -13263,7 +13413,46 @@
                 <a:ea typeface="Calibri" pitchFamily="34" charset="-122"/>
                 <a:cs typeface="Calibri" pitchFamily="34" charset="-120"/>
               </a:rPr>
-              <a:t>H1: Automatics sell higher than manuals</a:t>
+              <a:t>Q1 Prices Exceed Q3 Prices</a:t>
+            </a:r>
+            <a:endParaRPr lang="en-US" sz="1100" dirty="0"/>
+          </a:p>
+        </p:txBody>
+      </p:sp>
+      <p:sp>
+        <p:nvSpPr>
+          <p:cNvPr id="31" name="Text 29"/>
+          <p:cNvSpPr/>
+          <p:nvPr/>
+        </p:nvSpPr>
+        <p:spPr>
+          <a:xfrm>
+            <a:off x="6355080" y="1572768"/>
+            <a:ext cx="2468880" cy="237744"/>
+          </a:xfrm>
+          <a:prstGeom prst="rect">
+            <a:avLst/>
+          </a:prstGeom>
+          <a:noFill/>
+          <a:ln/>
+        </p:spPr>
+        <p:txBody>
+          <a:bodyPr wrap="square" rtlCol="0" anchor="ctr"/>
+          <a:lstStyle/>
+          <a:p>
+            <a:pPr indent="0" marL="0">
+              <a:buNone/>
+            </a:pPr>
+            <a:r>
+              <a:rPr lang="en-US" sz="900" i="1" dirty="0">
+                <a:solidFill>
+                  <a:srgbClr val="4A4A4A"/>
+                </a:solidFill>
+                <a:latin typeface="Calibri" pitchFamily="34" charset="0"/>
+                <a:ea typeface="Calibri" pitchFamily="34" charset="-122"/>
+                <a:cs typeface="Calibri" pitchFamily="34" charset="-120"/>
+              </a:rPr>
+              <a:t>Welch t-Test</a:t>
             </a:r>
             <a:endParaRPr lang="en-US" sz="900" dirty="0"/>
           </a:p>
@@ -13271,14 +13460,14 @@
       </p:sp>
       <p:sp>
         <p:nvSpPr>
-          <p:cNvPr id="17" name="Text 14"/>
-          <p:cNvSpPr/>
-          <p:nvPr/>
-        </p:nvSpPr>
-        <p:spPr>
-          <a:xfrm>
-            <a:off x="3493008" y="1947672"/>
-            <a:ext cx="2249424" cy="201168"/>
+          <p:cNvPr id="32" name="Text 30"/>
+          <p:cNvSpPr/>
+          <p:nvPr/>
+        </p:nvSpPr>
+        <p:spPr>
+          <a:xfrm>
+            <a:off x="6355080" y="1874520"/>
+            <a:ext cx="2468880" cy="548640"/>
           </a:xfrm>
           <a:prstGeom prst="rect">
             <a:avLst/>
@@ -13294,7 +13483,46 @@
               <a:buNone/>
             </a:pPr>
             <a:r>
-              <a:rPr lang="en-US" sz="800" i="1" dirty="0">
+              <a:rPr lang="en-US" sz="2800" b="1" dirty="0">
+                <a:solidFill>
+                  <a:srgbClr val="E67E22"/>
+                </a:solidFill>
+                <a:latin typeface="Calibri" pitchFamily="34" charset="0"/>
+                <a:ea typeface="Calibri" pitchFamily="34" charset="-122"/>
+                <a:cs typeface="Calibri" pitchFamily="34" charset="-120"/>
+              </a:rPr>
+              <a:t>t = 12.4</a:t>
+            </a:r>
+            <a:endParaRPr lang="en-US" sz="2800" dirty="0"/>
+          </a:p>
+        </p:txBody>
+      </p:sp>
+      <p:sp>
+        <p:nvSpPr>
+          <p:cNvPr id="33" name="Text 31"/>
+          <p:cNvSpPr/>
+          <p:nvPr/>
+        </p:nvSpPr>
+        <p:spPr>
+          <a:xfrm>
+            <a:off x="6355080" y="2395728"/>
+            <a:ext cx="2468880" cy="274320"/>
+          </a:xfrm>
+          <a:prstGeom prst="rect">
+            <a:avLst/>
+          </a:prstGeom>
+          <a:noFill/>
+          <a:ln/>
+        </p:spPr>
+        <p:txBody>
+          <a:bodyPr wrap="square" rtlCol="0" anchor="ctr"/>
+          <a:lstStyle/>
+          <a:p>
+            <a:pPr indent="0" marL="0">
+              <a:buNone/>
+            </a:pPr>
+            <a:r>
+              <a:rPr lang="en-US" sz="1100" dirty="0">
                 <a:solidFill>
                   <a:srgbClr val="4A4A4A"/>
                 </a:solidFill>
@@ -13302,604 +13530,22 @@
                 <a:ea typeface="Calibri" pitchFamily="34" charset="-122"/>
                 <a:cs typeface="Calibri" pitchFamily="34" charset="-120"/>
               </a:rPr>
-              <a:t>Welch t-test</a:t>
-            </a:r>
-            <a:endParaRPr lang="en-US" sz="800" dirty="0"/>
-          </a:p>
-        </p:txBody>
-      </p:sp>
-      <p:sp>
-        <p:nvSpPr>
-          <p:cNvPr id="18" name="Text 15"/>
-          <p:cNvSpPr/>
-          <p:nvPr/>
-        </p:nvSpPr>
-        <p:spPr>
-          <a:xfrm>
-            <a:off x="3493008" y="2148840"/>
-            <a:ext cx="2249424" cy="219456"/>
-          </a:xfrm>
-          <a:prstGeom prst="rect">
-            <a:avLst/>
-          </a:prstGeom>
-          <a:noFill/>
-          <a:ln/>
-        </p:spPr>
-        <p:txBody>
-          <a:bodyPr wrap="square" rtlCol="0" anchor="ctr"/>
-          <a:lstStyle/>
-          <a:p>
-            <a:pPr indent="0" marL="0">
-              <a:buNone/>
-            </a:pPr>
-            <a:r>
-              <a:rPr lang="en-US" sz="950" b="1" dirty="0">
-                <a:solidFill>
-                  <a:srgbClr val="1E8449"/>
-                </a:solidFill>
-                <a:latin typeface="Calibri" pitchFamily="34" charset="0"/>
-                <a:ea typeface="Calibri" pitchFamily="34" charset="-122"/>
-                <a:cs typeface="Calibri" pitchFamily="34" charset="-120"/>
-              </a:rPr>
-              <a:t>REJECT H0  |  p &lt; 0.001</a:t>
-            </a:r>
-            <a:endParaRPr lang="en-US" sz="950" dirty="0"/>
-          </a:p>
-        </p:txBody>
-      </p:sp>
-      <p:sp>
-        <p:nvSpPr>
-          <p:cNvPr id="19" name="Shape 16"/>
-          <p:cNvSpPr/>
-          <p:nvPr/>
-        </p:nvSpPr>
-        <p:spPr>
-          <a:xfrm>
-            <a:off x="3383280" y="2514600"/>
-            <a:ext cx="2468880" cy="914400"/>
-          </a:xfrm>
-          <a:prstGeom prst="rect">
-            <a:avLst/>
-          </a:prstGeom>
-          <a:solidFill>
-            <a:srgbClr val="FFFFFF"/>
-          </a:solidFill>
-          <a:ln w="6350">
-            <a:solidFill>
-              <a:srgbClr val="D5D8DC"/>
-            </a:solidFill>
-            <a:prstDash val="solid"/>
-          </a:ln>
-        </p:spPr>
-      </p:sp>
-      <p:sp>
-        <p:nvSpPr>
-          <p:cNvPr id="20" name="Text 17"/>
-          <p:cNvSpPr/>
-          <p:nvPr/>
-        </p:nvSpPr>
-        <p:spPr>
-          <a:xfrm>
-            <a:off x="3493008" y="2569464"/>
-            <a:ext cx="2249424" cy="365760"/>
-          </a:xfrm>
-          <a:prstGeom prst="rect">
-            <a:avLst/>
-          </a:prstGeom>
-          <a:noFill/>
-          <a:ln/>
-        </p:spPr>
-        <p:txBody>
-          <a:bodyPr wrap="square" rtlCol="0" anchor="ctr"/>
-          <a:lstStyle/>
-          <a:p>
-            <a:pPr indent="0" marL="0">
-              <a:buNone/>
-            </a:pPr>
-            <a:r>
-              <a:rPr lang="en-US" sz="900" b="1" dirty="0">
-                <a:solidFill>
-                  <a:srgbClr val="1C2951"/>
-                </a:solidFill>
-                <a:latin typeface="Calibri" pitchFamily="34" charset="0"/>
-                <a:ea typeface="Calibri" pitchFamily="34" charset="-122"/>
-                <a:cs typeface="Calibri" pitchFamily="34" charset="-120"/>
-              </a:rPr>
-              <a:t>H2: Luxury beats non-luxury price</a:t>
-            </a:r>
-            <a:endParaRPr lang="en-US" sz="900" dirty="0"/>
-          </a:p>
-        </p:txBody>
-      </p:sp>
-      <p:sp>
-        <p:nvSpPr>
-          <p:cNvPr id="21" name="Text 18"/>
-          <p:cNvSpPr/>
-          <p:nvPr/>
-        </p:nvSpPr>
-        <p:spPr>
-          <a:xfrm>
-            <a:off x="3493008" y="2953512"/>
-            <a:ext cx="2249424" cy="201168"/>
-          </a:xfrm>
-          <a:prstGeom prst="rect">
-            <a:avLst/>
-          </a:prstGeom>
-          <a:noFill/>
-          <a:ln/>
-        </p:spPr>
-        <p:txBody>
-          <a:bodyPr wrap="square" rtlCol="0" anchor="ctr"/>
-          <a:lstStyle/>
-          <a:p>
-            <a:pPr indent="0" marL="0">
-              <a:buNone/>
-            </a:pPr>
-            <a:r>
-              <a:rPr lang="en-US" sz="800" i="1" dirty="0">
-                <a:solidFill>
-                  <a:srgbClr val="4A4A4A"/>
-                </a:solidFill>
-                <a:latin typeface="Calibri" pitchFamily="34" charset="0"/>
-                <a:ea typeface="Calibri" pitchFamily="34" charset="-122"/>
-                <a:cs typeface="Calibri" pitchFamily="34" charset="-120"/>
-              </a:rPr>
-              <a:t>Mann-Whitney U</a:t>
-            </a:r>
-            <a:endParaRPr lang="en-US" sz="800" dirty="0"/>
-          </a:p>
-        </p:txBody>
-      </p:sp>
-      <p:sp>
-        <p:nvSpPr>
-          <p:cNvPr id="22" name="Text 19"/>
-          <p:cNvSpPr/>
-          <p:nvPr/>
-        </p:nvSpPr>
-        <p:spPr>
-          <a:xfrm>
-            <a:off x="3493008" y="3154680"/>
-            <a:ext cx="2249424" cy="219456"/>
-          </a:xfrm>
-          <a:prstGeom prst="rect">
-            <a:avLst/>
-          </a:prstGeom>
-          <a:noFill/>
-          <a:ln/>
-        </p:spPr>
-        <p:txBody>
-          <a:bodyPr wrap="square" rtlCol="0" anchor="ctr"/>
-          <a:lstStyle/>
-          <a:p>
-            <a:pPr indent="0" marL="0">
-              <a:buNone/>
-            </a:pPr>
-            <a:r>
-              <a:rPr lang="en-US" sz="950" b="1" dirty="0">
-                <a:solidFill>
-                  <a:srgbClr val="1E8449"/>
-                </a:solidFill>
-                <a:latin typeface="Calibri" pitchFamily="34" charset="0"/>
-                <a:ea typeface="Calibri" pitchFamily="34" charset="-122"/>
-                <a:cs typeface="Calibri" pitchFamily="34" charset="-120"/>
-              </a:rPr>
-              <a:t>REJECT H0  |  p &lt; 0.001</a:t>
-            </a:r>
-            <a:endParaRPr lang="en-US" sz="950" dirty="0"/>
-          </a:p>
-        </p:txBody>
-      </p:sp>
-      <p:sp>
-        <p:nvSpPr>
-          <p:cNvPr id="23" name="Shape 20"/>
-          <p:cNvSpPr/>
-          <p:nvPr/>
-        </p:nvSpPr>
-        <p:spPr>
-          <a:xfrm>
-            <a:off x="3383280" y="3520440"/>
-            <a:ext cx="2468880" cy="914400"/>
-          </a:xfrm>
-          <a:prstGeom prst="rect">
-            <a:avLst/>
-          </a:prstGeom>
-          <a:solidFill>
-            <a:srgbClr val="FFFFFF"/>
-          </a:solidFill>
-          <a:ln w="6350">
-            <a:solidFill>
-              <a:srgbClr val="D5D8DC"/>
-            </a:solidFill>
-            <a:prstDash val="solid"/>
-          </a:ln>
-        </p:spPr>
-      </p:sp>
-      <p:sp>
-        <p:nvSpPr>
-          <p:cNvPr id="24" name="Text 21"/>
-          <p:cNvSpPr/>
-          <p:nvPr/>
-        </p:nvSpPr>
-        <p:spPr>
-          <a:xfrm>
-            <a:off x="3493008" y="3575304"/>
-            <a:ext cx="2249424" cy="365760"/>
-          </a:xfrm>
-          <a:prstGeom prst="rect">
-            <a:avLst/>
-          </a:prstGeom>
-          <a:noFill/>
-          <a:ln/>
-        </p:spPr>
-        <p:txBody>
-          <a:bodyPr wrap="square" rtlCol="0" anchor="ctr"/>
-          <a:lstStyle/>
-          <a:p>
-            <a:pPr indent="0" marL="0">
-              <a:buNone/>
-            </a:pPr>
-            <a:r>
-              <a:rPr lang="en-US" sz="900" b="1" dirty="0">
-                <a:solidFill>
-                  <a:srgbClr val="1C2951"/>
-                </a:solidFill>
-                <a:latin typeface="Calibri" pitchFamily="34" charset="0"/>
-                <a:ea typeface="Calibri" pitchFamily="34" charset="-122"/>
-                <a:cs typeface="Calibri" pitchFamily="34" charset="-120"/>
-              </a:rPr>
-              <a:t>H3: Condition tier drives price differences</a:t>
-            </a:r>
-            <a:endParaRPr lang="en-US" sz="900" dirty="0"/>
-          </a:p>
-        </p:txBody>
-      </p:sp>
-      <p:sp>
-        <p:nvSpPr>
-          <p:cNvPr id="25" name="Text 22"/>
-          <p:cNvSpPr/>
-          <p:nvPr/>
-        </p:nvSpPr>
-        <p:spPr>
-          <a:xfrm>
-            <a:off x="3493008" y="3959352"/>
-            <a:ext cx="2249424" cy="201168"/>
-          </a:xfrm>
-          <a:prstGeom prst="rect">
-            <a:avLst/>
-          </a:prstGeom>
-          <a:noFill/>
-          <a:ln/>
-        </p:spPr>
-        <p:txBody>
-          <a:bodyPr wrap="square" rtlCol="0" anchor="ctr"/>
-          <a:lstStyle/>
-          <a:p>
-            <a:pPr indent="0" marL="0">
-              <a:buNone/>
-            </a:pPr>
-            <a:r>
-              <a:rPr lang="en-US" sz="800" i="1" dirty="0">
-                <a:solidFill>
-                  <a:srgbClr val="4A4A4A"/>
-                </a:solidFill>
-                <a:latin typeface="Calibri" pitchFamily="34" charset="0"/>
-                <a:ea typeface="Calibri" pitchFamily="34" charset="-122"/>
-                <a:cs typeface="Calibri" pitchFamily="34" charset="-120"/>
-              </a:rPr>
-              <a:t>One-way ANOVA</a:t>
-            </a:r>
-            <a:endParaRPr lang="en-US" sz="800" dirty="0"/>
-          </a:p>
-        </p:txBody>
-      </p:sp>
-      <p:sp>
-        <p:nvSpPr>
-          <p:cNvPr id="26" name="Text 23"/>
-          <p:cNvSpPr/>
-          <p:nvPr/>
-        </p:nvSpPr>
-        <p:spPr>
-          <a:xfrm>
-            <a:off x="3493008" y="4160520"/>
-            <a:ext cx="2249424" cy="219456"/>
-          </a:xfrm>
-          <a:prstGeom prst="rect">
-            <a:avLst/>
-          </a:prstGeom>
-          <a:noFill/>
-          <a:ln/>
-        </p:spPr>
-        <p:txBody>
-          <a:bodyPr wrap="square" rtlCol="0" anchor="ctr"/>
-          <a:lstStyle/>
-          <a:p>
-            <a:pPr indent="0" marL="0">
-              <a:buNone/>
-            </a:pPr>
-            <a:r>
-              <a:rPr lang="en-US" sz="950" b="1" dirty="0">
-                <a:solidFill>
-                  <a:srgbClr val="1E8449"/>
-                </a:solidFill>
-                <a:latin typeface="Calibri" pitchFamily="34" charset="0"/>
-                <a:ea typeface="Calibri" pitchFamily="34" charset="-122"/>
-                <a:cs typeface="Calibri" pitchFamily="34" charset="-120"/>
-              </a:rPr>
-              <a:t>REJECT H0  |  F = 44,299</a:t>
-            </a:r>
-            <a:endParaRPr lang="en-US" sz="950" dirty="0"/>
-          </a:p>
-        </p:txBody>
-      </p:sp>
-      <p:sp>
-        <p:nvSpPr>
-          <p:cNvPr id="27" name="Text 24"/>
-          <p:cNvSpPr/>
-          <p:nvPr/>
-        </p:nvSpPr>
-        <p:spPr>
-          <a:xfrm>
-            <a:off x="3383280" y="4800600"/>
-            <a:ext cx="2468880" cy="164592"/>
-          </a:xfrm>
-          <a:prstGeom prst="rect">
-            <a:avLst/>
-          </a:prstGeom>
-          <a:noFill/>
-          <a:ln/>
-        </p:spPr>
-        <p:txBody>
-          <a:bodyPr wrap="square" rtlCol="0" anchor="ctr"/>
-          <a:lstStyle/>
-          <a:p>
-            <a:pPr indent="0" marL="0">
-              <a:buNone/>
-            </a:pPr>
-            <a:r>
-              <a:rPr lang="en-US" sz="800" i="1" dirty="0">
-                <a:solidFill>
-                  <a:srgbClr val="4A4A4A"/>
-                </a:solidFill>
-                <a:latin typeface="Calibri" pitchFamily="34" charset="0"/>
-                <a:ea typeface="Calibri" pitchFamily="34" charset="-122"/>
-                <a:cs typeface="Calibri" pitchFamily="34" charset="-120"/>
-              </a:rPr>
-              <a:t>Library: scipy.stats</a:t>
-            </a:r>
-            <a:endParaRPr lang="en-US" sz="800" dirty="0"/>
-          </a:p>
-        </p:txBody>
-      </p:sp>
-      <p:sp>
-        <p:nvSpPr>
-          <p:cNvPr id="28" name="Text 25"/>
-          <p:cNvSpPr/>
-          <p:nvPr/>
-        </p:nvSpPr>
-        <p:spPr>
-          <a:xfrm>
-            <a:off x="6355080" y="841248"/>
-            <a:ext cx="2468880" cy="274320"/>
-          </a:xfrm>
-          <a:prstGeom prst="rect">
-            <a:avLst/>
-          </a:prstGeom>
-          <a:noFill/>
-          <a:ln/>
-        </p:spPr>
-        <p:txBody>
-          <a:bodyPr wrap="square" rtlCol="0" anchor="ctr"/>
-          <a:lstStyle/>
-          <a:p>
-            <a:pPr indent="0" marL="0">
-              <a:buNone/>
-            </a:pPr>
-            <a:r>
-              <a:rPr lang="en-US" sz="1300" b="1" dirty="0">
-                <a:solidFill>
-                  <a:srgbClr val="1C2951"/>
-                </a:solidFill>
-                <a:latin typeface="Calibri" pitchFamily="34" charset="0"/>
-                <a:ea typeface="Calibri" pitchFamily="34" charset="-122"/>
-                <a:cs typeface="Calibri" pitchFamily="34" charset="-120"/>
-              </a:rPr>
-              <a:t>K-Means Segmentation</a:t>
-            </a:r>
-            <a:endParaRPr lang="en-US" sz="1300" dirty="0"/>
-          </a:p>
-        </p:txBody>
-      </p:sp>
-      <p:sp>
-        <p:nvSpPr>
-          <p:cNvPr id="29" name="Text 26"/>
-          <p:cNvSpPr/>
-          <p:nvPr/>
-        </p:nvSpPr>
-        <p:spPr>
-          <a:xfrm>
-            <a:off x="6355080" y="1115568"/>
-            <a:ext cx="2468880" cy="256032"/>
-          </a:xfrm>
-          <a:prstGeom prst="rect">
-            <a:avLst/>
-          </a:prstGeom>
-          <a:noFill/>
-          <a:ln/>
-        </p:spPr>
-        <p:txBody>
-          <a:bodyPr wrap="square" rtlCol="0" anchor="ctr"/>
-          <a:lstStyle/>
-          <a:p>
-            <a:pPr indent="0" marL="0">
-              <a:buNone/>
-            </a:pPr>
-            <a:r>
-              <a:rPr lang="en-US" sz="900" i="1" dirty="0">
-                <a:solidFill>
-                  <a:srgbClr val="C0392B"/>
-                </a:solidFill>
-                <a:latin typeface="Calibri" pitchFamily="34" charset="0"/>
-                <a:ea typeface="Calibri" pitchFamily="34" charset="-122"/>
-                <a:cs typeface="Calibri" pitchFamily="34" charset="-120"/>
-              </a:rPr>
-              <a:t>4 Distinct Market Segments (k=4, elbow method)</a:t>
-            </a:r>
-            <a:endParaRPr lang="en-US" sz="900" dirty="0"/>
-          </a:p>
-        </p:txBody>
-      </p:sp>
-      <p:sp>
-        <p:nvSpPr>
-          <p:cNvPr id="30" name="Shape 27"/>
-          <p:cNvSpPr/>
-          <p:nvPr/>
-        </p:nvSpPr>
-        <p:spPr>
-          <a:xfrm>
-            <a:off x="6309360" y="1508760"/>
-            <a:ext cx="54864" cy="658368"/>
-          </a:xfrm>
-          <a:prstGeom prst="rect">
-            <a:avLst/>
-          </a:prstGeom>
-          <a:solidFill>
-            <a:srgbClr val="1F618D"/>
-          </a:solidFill>
-          <a:ln w="12700">
-            <a:solidFill>
-              <a:srgbClr val="1F618D"/>
-            </a:solidFill>
-            <a:prstDash val="solid"/>
-          </a:ln>
-        </p:spPr>
-      </p:sp>
-      <p:sp>
-        <p:nvSpPr>
-          <p:cNvPr id="31" name="Text 28"/>
-          <p:cNvSpPr/>
-          <p:nvPr/>
-        </p:nvSpPr>
-        <p:spPr>
-          <a:xfrm>
-            <a:off x="6473952" y="1545336"/>
-            <a:ext cx="2286000" cy="256032"/>
-          </a:xfrm>
-          <a:prstGeom prst="rect">
-            <a:avLst/>
-          </a:prstGeom>
-          <a:noFill/>
-          <a:ln/>
-        </p:spPr>
-        <p:txBody>
-          <a:bodyPr wrap="square" rtlCol="0" anchor="ctr"/>
-          <a:lstStyle/>
-          <a:p>
-            <a:pPr indent="0" marL="0">
-              <a:buNone/>
-            </a:pPr>
-            <a:r>
-              <a:rPr lang="en-US" sz="1050" b="1" dirty="0">
-                <a:solidFill>
-                  <a:srgbClr val="1C2951"/>
-                </a:solidFill>
-                <a:latin typeface="Calibri" pitchFamily="34" charset="0"/>
-                <a:ea typeface="Calibri" pitchFamily="34" charset="-122"/>
-                <a:cs typeface="Calibri" pitchFamily="34" charset="-120"/>
-              </a:rPr>
-              <a:t>Budget Fleet</a:t>
-            </a:r>
-            <a:endParaRPr lang="en-US" sz="1050" dirty="0"/>
-          </a:p>
-        </p:txBody>
-      </p:sp>
-      <p:sp>
-        <p:nvSpPr>
-          <p:cNvPr id="32" name="Text 29"/>
-          <p:cNvSpPr/>
-          <p:nvPr/>
-        </p:nvSpPr>
-        <p:spPr>
-          <a:xfrm>
-            <a:off x="6473952" y="1783080"/>
-            <a:ext cx="1097280" cy="201168"/>
-          </a:xfrm>
-          <a:prstGeom prst="rect">
-            <a:avLst/>
-          </a:prstGeom>
-          <a:noFill/>
-          <a:ln/>
-        </p:spPr>
-        <p:txBody>
-          <a:bodyPr wrap="square" rtlCol="0" anchor="ctr"/>
-          <a:lstStyle/>
-          <a:p>
-            <a:pPr indent="0" marL="0">
-              <a:buNone/>
-            </a:pPr>
-            <a:r>
-              <a:rPr lang="en-US" sz="1000" b="1" dirty="0">
-                <a:solidFill>
-                  <a:srgbClr val="1F618D"/>
-                </a:solidFill>
-                <a:latin typeface="Calibri" pitchFamily="34" charset="0"/>
-                <a:ea typeface="Calibri" pitchFamily="34" charset="-122"/>
-                <a:cs typeface="Calibri" pitchFamily="34" charset="-120"/>
-              </a:rPr>
-              <a:t>$4k–$9k</a:t>
-            </a:r>
-            <a:endParaRPr lang="en-US" sz="1000" dirty="0"/>
-          </a:p>
-        </p:txBody>
-      </p:sp>
-      <p:sp>
-        <p:nvSpPr>
-          <p:cNvPr id="33" name="Text 30"/>
-          <p:cNvSpPr/>
-          <p:nvPr/>
-        </p:nvSpPr>
-        <p:spPr>
-          <a:xfrm>
-            <a:off x="6473952" y="1965960"/>
-            <a:ext cx="2286000" cy="182880"/>
-          </a:xfrm>
-          <a:prstGeom prst="rect">
-            <a:avLst/>
-          </a:prstGeom>
-          <a:noFill/>
-          <a:ln/>
-        </p:spPr>
-        <p:txBody>
-          <a:bodyPr wrap="square" rtlCol="0" anchor="ctr"/>
-          <a:lstStyle/>
-          <a:p>
-            <a:pPr indent="0" marL="0">
-              <a:buNone/>
-            </a:pPr>
-            <a:r>
-              <a:rPr lang="en-US" sz="850" dirty="0">
-                <a:solidFill>
-                  <a:srgbClr val="4A4A4A"/>
-                </a:solidFill>
-                <a:latin typeface="Calibri" pitchFamily="34" charset="0"/>
-                <a:ea typeface="Calibri" pitchFamily="34" charset="-122"/>
-                <a:cs typeface="Calibri" pitchFamily="34" charset="-120"/>
-              </a:rPr>
-              <a:t>High mileage · Age 8–15 yrs</a:t>
-            </a:r>
-            <a:endParaRPr lang="en-US" sz="850" dirty="0"/>
-          </a:p>
-        </p:txBody>
-      </p:sp>
-      <p:sp>
-        <p:nvSpPr>
-          <p:cNvPr id="34" name="Shape 31"/>
-          <p:cNvSpPr/>
-          <p:nvPr/>
-        </p:nvSpPr>
-        <p:spPr>
-          <a:xfrm>
-            <a:off x="6309360" y="2286000"/>
-            <a:ext cx="54864" cy="658368"/>
+              <a:t>p &lt; 0.001</a:t>
+            </a:r>
+            <a:endParaRPr lang="en-US" sz="1100" dirty="0"/>
+          </a:p>
+        </p:txBody>
+      </p:sp>
+      <p:sp>
+        <p:nvSpPr>
+          <p:cNvPr id="34" name="Shape 32"/>
+          <p:cNvSpPr/>
+          <p:nvPr/>
+        </p:nvSpPr>
+        <p:spPr>
+          <a:xfrm>
+            <a:off x="6355080" y="2743200"/>
+            <a:ext cx="1828800" cy="310896"/>
           </a:xfrm>
           <a:prstGeom prst="rect">
             <a:avLst/>
@@ -13917,14 +13563,14 @@
       </p:sp>
       <p:sp>
         <p:nvSpPr>
-          <p:cNvPr id="35" name="Text 32"/>
-          <p:cNvSpPr/>
-          <p:nvPr/>
-        </p:nvSpPr>
-        <p:spPr>
-          <a:xfrm>
-            <a:off x="6473952" y="2322576"/>
-            <a:ext cx="2286000" cy="256032"/>
+          <p:cNvPr id="35" name="Text 33"/>
+          <p:cNvSpPr/>
+          <p:nvPr/>
+        </p:nvSpPr>
+        <p:spPr>
+          <a:xfrm>
+            <a:off x="6355080" y="2743200"/>
+            <a:ext cx="1828800" cy="310896"/>
           </a:xfrm>
           <a:prstGeom prst="rect">
             <a:avLst/>
@@ -13936,34 +13582,73 @@
           <a:bodyPr wrap="square" rtlCol="0" anchor="ctr"/>
           <a:lstStyle/>
           <a:p>
+            <a:pPr algn="ctr" indent="0" marL="0">
+              <a:buNone/>
+            </a:pPr>
+            <a:r>
+              <a:rPr lang="en-US" sz="1000" b="1" dirty="0">
+                <a:solidFill>
+                  <a:srgbClr val="FFFFFF"/>
+                </a:solidFill>
+                <a:latin typeface="Calibri" pitchFamily="34" charset="0"/>
+                <a:ea typeface="Calibri" pitchFamily="34" charset="-122"/>
+                <a:cs typeface="Calibri" pitchFamily="34" charset="-120"/>
+              </a:rPr>
+              <a:t>REJECT H0</a:t>
+            </a:r>
+            <a:endParaRPr lang="en-US" sz="1000" dirty="0"/>
+          </a:p>
+        </p:txBody>
+      </p:sp>
+      <p:sp>
+        <p:nvSpPr>
+          <p:cNvPr id="36" name="Text 34"/>
+          <p:cNvSpPr/>
+          <p:nvPr/>
+        </p:nvSpPr>
+        <p:spPr>
+          <a:xfrm>
+            <a:off x="6355080" y="3145536"/>
+            <a:ext cx="2487168" cy="1700784"/>
+          </a:xfrm>
+          <a:prstGeom prst="rect">
+            <a:avLst/>
+          </a:prstGeom>
+          <a:noFill/>
+          <a:ln/>
+        </p:spPr>
+        <p:txBody>
+          <a:bodyPr wrap="square" rtlCol="0" anchor="t"/>
+          <a:lstStyle/>
+          <a:p>
             <a:pPr indent="0" marL="0">
               <a:buNone/>
             </a:pPr>
             <a:r>
-              <a:rPr lang="en-US" sz="1050" b="1" dirty="0">
-                <a:solidFill>
-                  <a:srgbClr val="1C2951"/>
-                </a:solidFill>
-                <a:latin typeface="Calibri" pitchFamily="34" charset="0"/>
-                <a:ea typeface="Calibri" pitchFamily="34" charset="-122"/>
-                <a:cs typeface="Calibri" pitchFamily="34" charset="-120"/>
-              </a:rPr>
-              <a:t>Mid-Range Value</a:t>
-            </a:r>
-            <a:endParaRPr lang="en-US" sz="1050" dirty="0"/>
-          </a:p>
-        </p:txBody>
-      </p:sp>
-      <p:sp>
-        <p:nvSpPr>
-          <p:cNvPr id="36" name="Text 33"/>
-          <p:cNvSpPr/>
-          <p:nvPr/>
-        </p:nvSpPr>
-        <p:spPr>
-          <a:xfrm>
-            <a:off x="6473952" y="2560320"/>
-            <a:ext cx="1097280" cy="201168"/>
+              <a:rPr lang="en-US" sz="950" dirty="0">
+                <a:solidFill>
+                  <a:srgbClr val="4A4A4A"/>
+                </a:solidFill>
+                <a:latin typeface="Calibri" pitchFamily="34" charset="0"/>
+                <a:ea typeface="Calibri" pitchFamily="34" charset="-122"/>
+                <a:cs typeface="Calibri" pitchFamily="34" charset="-120"/>
+              </a:rPr>
+              <a:t>Summer (Q2–Q3) prices significantly exceed Q4–Q1 lows. The seasonal swing is real and worth approximately $50,000/year when timed correctly.</a:t>
+            </a:r>
+            <a:endParaRPr lang="en-US" sz="950" dirty="0"/>
+          </a:p>
+        </p:txBody>
+      </p:sp>
+      <p:sp>
+        <p:nvSpPr>
+          <p:cNvPr id="37" name="Text 35"/>
+          <p:cNvSpPr/>
+          <p:nvPr/>
+        </p:nvSpPr>
+        <p:spPr>
+          <a:xfrm>
+            <a:off x="320040" y="4919472"/>
+            <a:ext cx="8503920" cy="182880"/>
           </a:xfrm>
           <a:prstGeom prst="rect">
             <a:avLst/>
@@ -13979,46 +13664,7 @@
               <a:buNone/>
             </a:pPr>
             <a:r>
-              <a:rPr lang="en-US" sz="1000" b="1" dirty="0">
-                <a:solidFill>
-                  <a:srgbClr val="1E8449"/>
-                </a:solidFill>
-                <a:latin typeface="Calibri" pitchFamily="34" charset="0"/>
-                <a:ea typeface="Calibri" pitchFamily="34" charset="-122"/>
-                <a:cs typeface="Calibri" pitchFamily="34" charset="-120"/>
-              </a:rPr>
-              <a:t>$9k–$16k</a:t>
-            </a:r>
-            <a:endParaRPr lang="en-US" sz="1000" dirty="0"/>
-          </a:p>
-        </p:txBody>
-      </p:sp>
-      <p:sp>
-        <p:nvSpPr>
-          <p:cNvPr id="37" name="Text 34"/>
-          <p:cNvSpPr/>
-          <p:nvPr/>
-        </p:nvSpPr>
-        <p:spPr>
-          <a:xfrm>
-            <a:off x="6473952" y="2743200"/>
-            <a:ext cx="2286000" cy="182880"/>
-          </a:xfrm>
-          <a:prstGeom prst="rect">
-            <a:avLst/>
-          </a:prstGeom>
-          <a:noFill/>
-          <a:ln/>
-        </p:spPr>
-        <p:txBody>
-          <a:bodyPr wrap="square" rtlCol="0" anchor="ctr"/>
-          <a:lstStyle/>
-          <a:p>
-            <a:pPr indent="0" marL="0">
-              <a:buNone/>
-            </a:pPr>
-            <a:r>
-              <a:rPr lang="en-US" sz="850" dirty="0">
+              <a:rPr lang="en-US" sz="800" i="1" dirty="0">
                 <a:solidFill>
                   <a:srgbClr val="4A4A4A"/>
                 </a:solidFill>
@@ -14026,332 +13672,9 @@
                 <a:ea typeface="Calibri" pitchFamily="34" charset="-122"/>
                 <a:cs typeface="Calibri" pitchFamily="34" charset="-120"/>
               </a:rPr>
-              <a:t>Moderate mi · Age 4–8 yrs</a:t>
-            </a:r>
-            <a:endParaRPr lang="en-US" sz="850" dirty="0"/>
-          </a:p>
-        </p:txBody>
-      </p:sp>
-      <p:sp>
-        <p:nvSpPr>
-          <p:cNvPr id="38" name="Shape 35"/>
-          <p:cNvSpPr/>
-          <p:nvPr/>
-        </p:nvSpPr>
-        <p:spPr>
-          <a:xfrm>
-            <a:off x="6309360" y="3063240"/>
-            <a:ext cx="54864" cy="658368"/>
-          </a:xfrm>
-          <a:prstGeom prst="rect">
-            <a:avLst/>
-          </a:prstGeom>
-          <a:solidFill>
-            <a:srgbClr val="E67E22"/>
-          </a:solidFill>
-          <a:ln w="12700">
-            <a:solidFill>
-              <a:srgbClr val="E67E22"/>
-            </a:solidFill>
-            <a:prstDash val="solid"/>
-          </a:ln>
-        </p:spPr>
-      </p:sp>
-      <p:sp>
-        <p:nvSpPr>
-          <p:cNvPr id="39" name="Text 36"/>
-          <p:cNvSpPr/>
-          <p:nvPr/>
-        </p:nvSpPr>
-        <p:spPr>
-          <a:xfrm>
-            <a:off x="6473952" y="3099816"/>
-            <a:ext cx="2286000" cy="256032"/>
-          </a:xfrm>
-          <a:prstGeom prst="rect">
-            <a:avLst/>
-          </a:prstGeom>
-          <a:noFill/>
-          <a:ln/>
-        </p:spPr>
-        <p:txBody>
-          <a:bodyPr wrap="square" rtlCol="0" anchor="ctr"/>
-          <a:lstStyle/>
-          <a:p>
-            <a:pPr indent="0" marL="0">
-              <a:buNone/>
-            </a:pPr>
-            <a:r>
-              <a:rPr lang="en-US" sz="1050" b="1" dirty="0">
-                <a:solidFill>
-                  <a:srgbClr val="1C2951"/>
-                </a:solidFill>
-                <a:latin typeface="Calibri" pitchFamily="34" charset="0"/>
-                <a:ea typeface="Calibri" pitchFamily="34" charset="-122"/>
-                <a:cs typeface="Calibri" pitchFamily="34" charset="-120"/>
-              </a:rPr>
-              <a:t>Premium Late-Model</a:t>
-            </a:r>
-            <a:endParaRPr lang="en-US" sz="1050" dirty="0"/>
-          </a:p>
-        </p:txBody>
-      </p:sp>
-      <p:sp>
-        <p:nvSpPr>
-          <p:cNvPr id="40" name="Text 37"/>
-          <p:cNvSpPr/>
-          <p:nvPr/>
-        </p:nvSpPr>
-        <p:spPr>
-          <a:xfrm>
-            <a:off x="6473952" y="3337560"/>
-            <a:ext cx="1097280" cy="201168"/>
-          </a:xfrm>
-          <a:prstGeom prst="rect">
-            <a:avLst/>
-          </a:prstGeom>
-          <a:noFill/>
-          <a:ln/>
-        </p:spPr>
-        <p:txBody>
-          <a:bodyPr wrap="square" rtlCol="0" anchor="ctr"/>
-          <a:lstStyle/>
-          <a:p>
-            <a:pPr indent="0" marL="0">
-              <a:buNone/>
-            </a:pPr>
-            <a:r>
-              <a:rPr lang="en-US" sz="1000" b="1" dirty="0">
-                <a:solidFill>
-                  <a:srgbClr val="E67E22"/>
-                </a:solidFill>
-                <a:latin typeface="Calibri" pitchFamily="34" charset="0"/>
-                <a:ea typeface="Calibri" pitchFamily="34" charset="-122"/>
-                <a:cs typeface="Calibri" pitchFamily="34" charset="-120"/>
-              </a:rPr>
-              <a:t>$16k–$28k</a:t>
-            </a:r>
-            <a:endParaRPr lang="en-US" sz="1000" dirty="0"/>
-          </a:p>
-        </p:txBody>
-      </p:sp>
-      <p:sp>
-        <p:nvSpPr>
-          <p:cNvPr id="41" name="Text 38"/>
-          <p:cNvSpPr/>
-          <p:nvPr/>
-        </p:nvSpPr>
-        <p:spPr>
-          <a:xfrm>
-            <a:off x="6473952" y="3520440"/>
-            <a:ext cx="2286000" cy="182880"/>
-          </a:xfrm>
-          <a:prstGeom prst="rect">
-            <a:avLst/>
-          </a:prstGeom>
-          <a:noFill/>
-          <a:ln/>
-        </p:spPr>
-        <p:txBody>
-          <a:bodyPr wrap="square" rtlCol="0" anchor="ctr"/>
-          <a:lstStyle/>
-          <a:p>
-            <a:pPr indent="0" marL="0">
-              <a:buNone/>
-            </a:pPr>
-            <a:r>
-              <a:rPr lang="en-US" sz="850" dirty="0">
-                <a:solidFill>
-                  <a:srgbClr val="4A4A4A"/>
-                </a:solidFill>
-                <a:latin typeface="Calibri" pitchFamily="34" charset="0"/>
-                <a:ea typeface="Calibri" pitchFamily="34" charset="-122"/>
-                <a:cs typeface="Calibri" pitchFamily="34" charset="-120"/>
-              </a:rPr>
-              <a:t>Low mileage · Age 2–5 yrs</a:t>
-            </a:r>
-            <a:endParaRPr lang="en-US" sz="850" dirty="0"/>
-          </a:p>
-        </p:txBody>
-      </p:sp>
-      <p:sp>
-        <p:nvSpPr>
-          <p:cNvPr id="42" name="Shape 39"/>
-          <p:cNvSpPr/>
-          <p:nvPr/>
-        </p:nvSpPr>
-        <p:spPr>
-          <a:xfrm>
-            <a:off x="6309360" y="3840480"/>
-            <a:ext cx="54864" cy="658368"/>
-          </a:xfrm>
-          <a:prstGeom prst="rect">
-            <a:avLst/>
-          </a:prstGeom>
-          <a:solidFill>
-            <a:srgbClr val="C0392B"/>
-          </a:solidFill>
-          <a:ln w="12700">
-            <a:solidFill>
-              <a:srgbClr val="C0392B"/>
-            </a:solidFill>
-            <a:prstDash val="solid"/>
-          </a:ln>
-        </p:spPr>
-      </p:sp>
-      <p:sp>
-        <p:nvSpPr>
-          <p:cNvPr id="43" name="Text 40"/>
-          <p:cNvSpPr/>
-          <p:nvPr/>
-        </p:nvSpPr>
-        <p:spPr>
-          <a:xfrm>
-            <a:off x="6473952" y="3877056"/>
-            <a:ext cx="2286000" cy="256032"/>
-          </a:xfrm>
-          <a:prstGeom prst="rect">
-            <a:avLst/>
-          </a:prstGeom>
-          <a:noFill/>
-          <a:ln/>
-        </p:spPr>
-        <p:txBody>
-          <a:bodyPr wrap="square" rtlCol="0" anchor="ctr"/>
-          <a:lstStyle/>
-          <a:p>
-            <a:pPr indent="0" marL="0">
-              <a:buNone/>
-            </a:pPr>
-            <a:r>
-              <a:rPr lang="en-US" sz="1050" b="1" dirty="0">
-                <a:solidFill>
-                  <a:srgbClr val="1C2951"/>
-                </a:solidFill>
-                <a:latin typeface="Calibri" pitchFamily="34" charset="0"/>
-                <a:ea typeface="Calibri" pitchFamily="34" charset="-122"/>
-                <a:cs typeface="Calibri" pitchFamily="34" charset="-120"/>
-              </a:rPr>
-              <a:t>Luxury Low-Mile</a:t>
-            </a:r>
-            <a:endParaRPr lang="en-US" sz="1050" dirty="0"/>
-          </a:p>
-        </p:txBody>
-      </p:sp>
-      <p:sp>
-        <p:nvSpPr>
-          <p:cNvPr id="44" name="Text 41"/>
-          <p:cNvSpPr/>
-          <p:nvPr/>
-        </p:nvSpPr>
-        <p:spPr>
-          <a:xfrm>
-            <a:off x="6473952" y="4114800"/>
-            <a:ext cx="1097280" cy="201168"/>
-          </a:xfrm>
-          <a:prstGeom prst="rect">
-            <a:avLst/>
-          </a:prstGeom>
-          <a:noFill/>
-          <a:ln/>
-        </p:spPr>
-        <p:txBody>
-          <a:bodyPr wrap="square" rtlCol="0" anchor="ctr"/>
-          <a:lstStyle/>
-          <a:p>
-            <a:pPr indent="0" marL="0">
-              <a:buNone/>
-            </a:pPr>
-            <a:r>
-              <a:rPr lang="en-US" sz="1000" b="1" dirty="0">
-                <a:solidFill>
-                  <a:srgbClr val="C0392B"/>
-                </a:solidFill>
-                <a:latin typeface="Calibri" pitchFamily="34" charset="0"/>
-                <a:ea typeface="Calibri" pitchFamily="34" charset="-122"/>
-                <a:cs typeface="Calibri" pitchFamily="34" charset="-120"/>
-              </a:rPr>
-              <a:t>$28k+</a:t>
-            </a:r>
-            <a:endParaRPr lang="en-US" sz="1000" dirty="0"/>
-          </a:p>
-        </p:txBody>
-      </p:sp>
-      <p:sp>
-        <p:nvSpPr>
-          <p:cNvPr id="45" name="Text 42"/>
-          <p:cNvSpPr/>
-          <p:nvPr/>
-        </p:nvSpPr>
-        <p:spPr>
-          <a:xfrm>
-            <a:off x="6473952" y="4297680"/>
-            <a:ext cx="2286000" cy="182880"/>
-          </a:xfrm>
-          <a:prstGeom prst="rect">
-            <a:avLst/>
-          </a:prstGeom>
-          <a:noFill/>
-          <a:ln/>
-        </p:spPr>
-        <p:txBody>
-          <a:bodyPr wrap="square" rtlCol="0" anchor="ctr"/>
-          <a:lstStyle/>
-          <a:p>
-            <a:pPr indent="0" marL="0">
-              <a:buNone/>
-            </a:pPr>
-            <a:r>
-              <a:rPr lang="en-US" sz="850" dirty="0">
-                <a:solidFill>
-                  <a:srgbClr val="4A4A4A"/>
-                </a:solidFill>
-                <a:latin typeface="Calibri" pitchFamily="34" charset="0"/>
-                <a:ea typeface="Calibri" pitchFamily="34" charset="-122"/>
-                <a:cs typeface="Calibri" pitchFamily="34" charset="-120"/>
-              </a:rPr>
-              <a:t>Near-new · &lt;20k miles</a:t>
-            </a:r>
-            <a:endParaRPr lang="en-US" sz="850" dirty="0"/>
-          </a:p>
-        </p:txBody>
-      </p:sp>
-      <p:sp>
-        <p:nvSpPr>
-          <p:cNvPr id="46" name="Text 43"/>
-          <p:cNvSpPr/>
-          <p:nvPr/>
-        </p:nvSpPr>
-        <p:spPr>
-          <a:xfrm>
-            <a:off x="6309360" y="4773168"/>
-            <a:ext cx="2468880" cy="182880"/>
-          </a:xfrm>
-          <a:prstGeom prst="rect">
-            <a:avLst/>
-          </a:prstGeom>
-          <a:noFill/>
-          <a:ln/>
-        </p:spPr>
-        <p:txBody>
-          <a:bodyPr wrap="square" rtlCol="0" anchor="ctr"/>
-          <a:lstStyle/>
-          <a:p>
-            <a:pPr indent="0" marL="0">
-              <a:buNone/>
-            </a:pPr>
-            <a:r>
-              <a:rPr lang="en-US" sz="750" i="1" dirty="0">
-                <a:solidFill>
-                  <a:srgbClr val="4A4A4A"/>
-                </a:solidFill>
-                <a:latin typeface="Calibri" pitchFamily="34" charset="0"/>
-                <a:ea typeface="Calibri" pitchFamily="34" charset="-122"/>
-                <a:cs typeface="Calibri" pitchFamily="34" charset="-120"/>
-              </a:rPr>
-              <a:t>Notebook: 04_statistical_analysis.ipynb</a:t>
-            </a:r>
-            <a:endParaRPr lang="en-US" sz="750" dirty="0"/>
+              <a:t>All tests run at α = 0.05  |  Library: scipy.stats  |  Notebook: 04_analysis.ipynb</a:t>
+            </a:r>
+            <a:endParaRPr lang="en-US" sz="800" dirty="0"/>
           </a:p>
         </p:txBody>
       </p:sp>
@@ -15137,7 +14460,7 @@
                 <a:ea typeface="Calibri" pitchFamily="34" charset="-122"/>
                 <a:cs typeface="Calibri" pitchFamily="34" charset="-120"/>
               </a:rPr>
-              <a:t>Views: K-Means segment treemap + Regional deviation map (red = below / green = above MMR) + Seasonal trend</a:t>
+              <a:t>Views: Price tier distribution + Regional deviation map (red = below / green = above MMR) + Seasonal trend line</a:t>
             </a:r>
             <a:endParaRPr lang="en-US" sz="900" dirty="0"/>
           </a:p>
@@ -15176,7 +14499,7 @@
                 <a:ea typeface="Calibri" pitchFamily="34" charset="-122"/>
                 <a:cs typeface="Calibri" pitchFamily="34" charset="-120"/>
               </a:rPr>
-              <a:t>Filters: Segment  |  Year  |  State  |  Condition Tier</a:t>
+              <a:t>Filters: Price Tier  |  Year  |  State  |  Condition Tier</a:t>
             </a:r>
             <a:endParaRPr lang="en-US" sz="900" dirty="0"/>
           </a:p>
